--- a/korad-경영평가-ppt/KORAD_경영평가_지면_재현_A4세로.pptx
+++ b/korad-경영평가-ppt/KORAD_경영평가_지면_재현_A4세로.pptx
@@ -2051,8 +2051,8 @@
         </p:nvSpPr>
         <p:spPr>
           <a:xfrm>
-            <a:off x="536870" y="761478"/>
-            <a:ext cx="6300000" cy="421826"/>
+            <a:off x="553304" y="758739"/>
+            <a:ext cx="6256174" cy="419635"/>
           </a:xfrm>
           <a:prstGeom prst="rect">
             <a:avLst/>
@@ -2083,8 +2083,8 @@
         </p:nvSpPr>
         <p:spPr>
           <a:xfrm>
-            <a:off x="5401565" y="766957"/>
-            <a:ext cx="1429826" cy="410870"/>
+            <a:off x="5405478" y="758739"/>
+            <a:ext cx="1404000" cy="419635"/>
           </a:xfrm>
           <a:prstGeom prst="rect">
             <a:avLst/>
@@ -2184,8 +2184,8 @@
         </p:nvSpPr>
         <p:spPr>
           <a:xfrm>
-            <a:off x="536870" y="1336696"/>
-            <a:ext cx="975130" cy="597130"/>
+            <a:off x="553304" y="1331217"/>
+            <a:ext cx="971526" cy="608087"/>
           </a:xfrm>
           <a:prstGeom prst="rect">
             <a:avLst/>
@@ -2247,8 +2247,8 @@
         </p:nvSpPr>
         <p:spPr>
           <a:xfrm>
-            <a:off x="1522957" y="1347652"/>
-            <a:ext cx="5313913" cy="575217"/>
+            <a:off x="1524831" y="1358609"/>
+            <a:ext cx="5284648" cy="553304"/>
           </a:xfrm>
           <a:prstGeom prst="rect">
             <a:avLst/>
@@ -2326,8 +2326,8 @@
         </p:nvSpPr>
         <p:spPr>
           <a:xfrm>
-            <a:off x="871043" y="1873565"/>
-            <a:ext cx="27391" cy="27391"/>
+            <a:off x="857348" y="1911913"/>
+            <a:ext cx="0" cy="0"/>
           </a:xfrm>
           <a:prstGeom prst="rect">
             <a:avLst/>
@@ -2356,8 +2356,8 @@
         </p:nvSpPr>
         <p:spPr>
           <a:xfrm>
-            <a:off x="947739" y="1873565"/>
-            <a:ext cx="27391" cy="27391"/>
+            <a:off x="954245" y="1911913"/>
+            <a:ext cx="0" cy="0"/>
           </a:xfrm>
           <a:prstGeom prst="rect">
             <a:avLst/>
@@ -2386,8 +2386,8 @@
         </p:nvSpPr>
         <p:spPr>
           <a:xfrm>
-            <a:off x="1024435" y="1873565"/>
-            <a:ext cx="27391" cy="27391"/>
+            <a:off x="1044704" y="1911913"/>
+            <a:ext cx="0" cy="0"/>
           </a:xfrm>
           <a:prstGeom prst="rect">
             <a:avLst/>
@@ -2416,8 +2416,8 @@
         </p:nvSpPr>
         <p:spPr>
           <a:xfrm>
-            <a:off x="1101130" y="1873565"/>
-            <a:ext cx="27391" cy="27391"/>
+            <a:off x="1087435" y="1911913"/>
+            <a:ext cx="69163" cy="0"/>
           </a:xfrm>
           <a:prstGeom prst="rect">
             <a:avLst/>
@@ -2446,8 +2446,8 @@
         </p:nvSpPr>
         <p:spPr>
           <a:xfrm>
-            <a:off x="1177826" y="1873565"/>
-            <a:ext cx="27391" cy="27391"/>
+            <a:off x="1156598" y="1911913"/>
+            <a:ext cx="95185" cy="0"/>
           </a:xfrm>
           <a:prstGeom prst="rect">
             <a:avLst/>
@@ -2476,8 +2476,8 @@
         </p:nvSpPr>
         <p:spPr>
           <a:xfrm>
-            <a:off x="536870" y="2081739"/>
-            <a:ext cx="6300000" cy="306783"/>
+            <a:off x="553304" y="2084478"/>
+            <a:ext cx="6256174" cy="310435"/>
           </a:xfrm>
           <a:prstGeom prst="rect">
             <a:avLst/>
@@ -2767,8 +2767,8 @@
         </p:nvSpPr>
         <p:spPr>
           <a:xfrm>
-            <a:off x="536870" y="2739130"/>
-            <a:ext cx="580696" cy="832696"/>
+            <a:off x="553304" y="2738217"/>
+            <a:ext cx="534130" cy="830870"/>
           </a:xfrm>
           <a:prstGeom prst="rect">
             <a:avLst/>
@@ -2818,8 +2818,8 @@
         </p:nvSpPr>
         <p:spPr>
           <a:xfrm>
-            <a:off x="536870" y="3571826"/>
-            <a:ext cx="580696" cy="630000"/>
+            <a:off x="553304" y="3569087"/>
+            <a:ext cx="534130" cy="642326"/>
           </a:xfrm>
           <a:prstGeom prst="rect">
             <a:avLst/>
@@ -2917,8 +2917,8 @@
         </p:nvSpPr>
         <p:spPr>
           <a:xfrm>
-            <a:off x="536870" y="4201826"/>
-            <a:ext cx="580696" cy="673826"/>
+            <a:off x="553304" y="4211413"/>
+            <a:ext cx="534130" cy="669717"/>
           </a:xfrm>
           <a:prstGeom prst="rect">
             <a:avLst/>
@@ -3016,8 +3016,8 @@
         </p:nvSpPr>
         <p:spPr>
           <a:xfrm>
-            <a:off x="1150435" y="2750087"/>
-            <a:ext cx="2826783" cy="219130"/>
+            <a:off x="1156598" y="2738217"/>
+            <a:ext cx="2788663" cy="228261"/>
           </a:xfrm>
           <a:prstGeom prst="rect">
             <a:avLst/>
@@ -3067,8 +3067,8 @@
         </p:nvSpPr>
         <p:spPr>
           <a:xfrm>
-            <a:off x="4004609" y="2750087"/>
-            <a:ext cx="2815826" cy="219130"/>
+            <a:off x="4004609" y="2738217"/>
+            <a:ext cx="2804870" cy="228261"/>
           </a:xfrm>
           <a:prstGeom prst="rect">
             <a:avLst/>
@@ -3353,8 +3353,8 @@
         </p:nvSpPr>
         <p:spPr>
           <a:xfrm>
-            <a:off x="1188783" y="3604696"/>
-            <a:ext cx="1040870" cy="175304"/>
+            <a:off x="1156598" y="3607435"/>
+            <a:ext cx="1060728" cy="169826"/>
           </a:xfrm>
           <a:prstGeom prst="rect">
             <a:avLst/>
@@ -3451,8 +3451,8 @@
         </p:nvSpPr>
         <p:spPr>
           <a:xfrm>
-            <a:off x="1188783" y="3801913"/>
-            <a:ext cx="1040870" cy="175304"/>
+            <a:off x="1156598" y="3804652"/>
+            <a:ext cx="1060728" cy="169826"/>
           </a:xfrm>
           <a:prstGeom prst="rect">
             <a:avLst/>
@@ -3549,8 +3549,8 @@
         </p:nvSpPr>
         <p:spPr>
           <a:xfrm>
-            <a:off x="1188783" y="3999130"/>
-            <a:ext cx="1040870" cy="175304"/>
+            <a:off x="1156598" y="3996391"/>
+            <a:ext cx="1060728" cy="175304"/>
           </a:xfrm>
           <a:prstGeom prst="rect">
             <a:avLst/>
@@ -3647,8 +3647,8 @@
         </p:nvSpPr>
         <p:spPr>
           <a:xfrm>
-            <a:off x="1150435" y="4229217"/>
-            <a:ext cx="1895478" cy="219130"/>
+            <a:off x="1156598" y="4211413"/>
+            <a:ext cx="1905750" cy="231457"/>
           </a:xfrm>
           <a:prstGeom prst="rect">
             <a:avLst/>
@@ -3698,8 +3698,8 @@
         </p:nvSpPr>
         <p:spPr>
           <a:xfrm>
-            <a:off x="3045913" y="4229217"/>
-            <a:ext cx="1928348" cy="219130"/>
+            <a:off x="3062348" y="4211413"/>
+            <a:ext cx="1931087" cy="231457"/>
           </a:xfrm>
           <a:prstGeom prst="rect">
             <a:avLst/>
@@ -3749,8 +3749,8 @@
         </p:nvSpPr>
         <p:spPr>
           <a:xfrm>
-            <a:off x="4974261" y="4229217"/>
-            <a:ext cx="1862609" cy="219130"/>
+            <a:off x="4993435" y="4211413"/>
+            <a:ext cx="1816043" cy="231457"/>
           </a:xfrm>
           <a:prstGeom prst="rect">
             <a:avLst/>
@@ -3800,8 +3800,8 @@
         </p:nvSpPr>
         <p:spPr>
           <a:xfrm>
-            <a:off x="2903478" y="4229217"/>
-            <a:ext cx="219130" cy="219130"/>
+            <a:off x="2942458" y="4211413"/>
+            <a:ext cx="214074" cy="231457"/>
           </a:xfrm>
           <a:prstGeom prst="rect">
             <a:avLst/>
@@ -3853,8 +3853,8 @@
         </p:nvSpPr>
         <p:spPr>
           <a:xfrm>
-            <a:off x="4831826" y="4229217"/>
-            <a:ext cx="219130" cy="219130"/>
+            <a:off x="4814759" y="4211413"/>
+            <a:ext cx="221817" cy="231457"/>
           </a:xfrm>
           <a:prstGeom prst="rect">
             <a:avLst/>
@@ -4157,8 +4157,8 @@
         </p:nvSpPr>
         <p:spPr>
           <a:xfrm>
-            <a:off x="1698261" y="4897565"/>
-            <a:ext cx="4601739" cy="186261"/>
+            <a:off x="1653439" y="4881130"/>
+            <a:ext cx="4601187" cy="210913"/>
           </a:xfrm>
           <a:prstGeom prst="rect">
             <a:avLst/>
@@ -4187,8 +4187,8 @@
         </p:nvSpPr>
         <p:spPr>
           <a:xfrm>
-            <a:off x="1742087" y="4886609"/>
-            <a:ext cx="4514087" cy="153391"/>
+            <a:off x="1742087" y="4881130"/>
+            <a:ext cx="4512539" cy="134217"/>
           </a:xfrm>
           <a:prstGeom prst="rect">
             <a:avLst/>
@@ -4217,8 +4217,8 @@
         </p:nvSpPr>
         <p:spPr>
           <a:xfrm>
-            <a:off x="3637565" y="5029043"/>
-            <a:ext cx="723130" cy="38348"/>
+            <a:off x="3657930" y="5015348"/>
+            <a:ext cx="715366" cy="76696"/>
           </a:xfrm>
           <a:prstGeom prst="rect">
             <a:avLst/>
@@ -4247,8 +4247,8 @@
         </p:nvSpPr>
         <p:spPr>
           <a:xfrm rot="10800000">
-            <a:off x="3922435" y="5067391"/>
-            <a:ext cx="153391" cy="82174"/>
+            <a:off x="3945261" y="5092043"/>
+            <a:ext cx="138783" cy="32870"/>
           </a:xfrm>
           <a:prstGeom prst="triangle">
             <a:avLst/>
@@ -4277,8 +4277,8 @@
         </p:nvSpPr>
         <p:spPr>
           <a:xfrm>
-            <a:off x="536870" y="5089304"/>
-            <a:ext cx="6300000" cy="290348"/>
+            <a:off x="553304" y="5092043"/>
+            <a:ext cx="6256174" cy="284870"/>
           </a:xfrm>
           <a:prstGeom prst="rect">
             <a:avLst/>
@@ -4309,8 +4309,8 @@
         </p:nvSpPr>
         <p:spPr>
           <a:xfrm>
-            <a:off x="547826" y="5100261"/>
-            <a:ext cx="591652" cy="268435"/>
+            <a:off x="553304" y="5092043"/>
+            <a:ext cx="603293" cy="284870"/>
           </a:xfrm>
           <a:prstGeom prst="rect">
             <a:avLst/>
@@ -4360,8 +4360,8 @@
         </p:nvSpPr>
         <p:spPr>
           <a:xfrm>
-            <a:off x="1188783" y="5127652"/>
-            <a:ext cx="5609739" cy="219130"/>
+            <a:off x="1156598" y="5124913"/>
+            <a:ext cx="5652880" cy="219130"/>
           </a:xfrm>
           <a:prstGeom prst="rect">
             <a:avLst/>
@@ -4437,8 +4437,8 @@
         </p:nvSpPr>
         <p:spPr>
           <a:xfrm>
-            <a:off x="536870" y="5434435"/>
-            <a:ext cx="6300000" cy="284870"/>
+            <a:off x="553304" y="5434435"/>
+            <a:ext cx="6256174" cy="287609"/>
           </a:xfrm>
           <a:prstGeom prst="rect">
             <a:avLst/>
@@ -4469,8 +4469,8 @@
         </p:nvSpPr>
         <p:spPr>
           <a:xfrm>
-            <a:off x="547826" y="5445391"/>
-            <a:ext cx="591652" cy="262957"/>
+            <a:off x="553304" y="5434435"/>
+            <a:ext cx="603293" cy="287609"/>
           </a:xfrm>
           <a:prstGeom prst="rect">
             <a:avLst/>
@@ -4703,8 +4703,8 @@
         </p:nvSpPr>
         <p:spPr>
           <a:xfrm>
-            <a:off x="536870" y="5779565"/>
-            <a:ext cx="6300000" cy="635478"/>
+            <a:off x="553304" y="5782304"/>
+            <a:ext cx="6256174" cy="632739"/>
           </a:xfrm>
           <a:prstGeom prst="rect">
             <a:avLst/>
@@ -4735,8 +4735,8 @@
         </p:nvSpPr>
         <p:spPr>
           <a:xfrm>
-            <a:off x="547826" y="5790522"/>
-            <a:ext cx="591652" cy="613565"/>
+            <a:off x="553304" y="5782304"/>
+            <a:ext cx="603293" cy="632739"/>
           </a:xfrm>
           <a:prstGeom prst="rect">
             <a:avLst/>
@@ -5149,8 +5149,8 @@
         </p:nvSpPr>
         <p:spPr>
           <a:xfrm>
-            <a:off x="536870" y="6475304"/>
-            <a:ext cx="6300000" cy="443739"/>
+            <a:off x="553304" y="6478043"/>
+            <a:ext cx="6256174" cy="443739"/>
           </a:xfrm>
           <a:prstGeom prst="rect">
             <a:avLst/>
@@ -5181,8 +5181,8 @@
         </p:nvSpPr>
         <p:spPr>
           <a:xfrm>
-            <a:off x="547826" y="6486261"/>
-            <a:ext cx="591652" cy="421826"/>
+            <a:off x="553304" y="6478043"/>
+            <a:ext cx="603293" cy="443739"/>
           </a:xfrm>
           <a:prstGeom prst="rect">
             <a:avLst/>
@@ -5511,8 +5511,8 @@
         </p:nvSpPr>
         <p:spPr>
           <a:xfrm>
-            <a:off x="536870" y="6979304"/>
-            <a:ext cx="6300000" cy="443739"/>
+            <a:off x="553304" y="6979304"/>
+            <a:ext cx="6256174" cy="443739"/>
           </a:xfrm>
           <a:prstGeom prst="rect">
             <a:avLst/>
@@ -5543,8 +5543,8 @@
         </p:nvSpPr>
         <p:spPr>
           <a:xfrm>
-            <a:off x="547826" y="6990261"/>
-            <a:ext cx="591652" cy="421826"/>
+            <a:off x="553304" y="6979304"/>
+            <a:ext cx="603293" cy="443739"/>
           </a:xfrm>
           <a:prstGeom prst="rect">
             <a:avLst/>
@@ -5920,8 +5920,8 @@
         </p:nvSpPr>
         <p:spPr>
           <a:xfrm>
-            <a:off x="4707817" y="7603826"/>
-            <a:ext cx="606399" cy="175304"/>
+            <a:off x="4730478" y="7603826"/>
+            <a:ext cx="567483" cy="139696"/>
           </a:xfrm>
           <a:prstGeom prst="rect">
             <a:avLst/>
@@ -5971,8 +5971,8 @@
         </p:nvSpPr>
         <p:spPr>
           <a:xfrm>
-            <a:off x="536870" y="7850348"/>
-            <a:ext cx="3122609" cy="1840696"/>
+            <a:off x="553304" y="7844870"/>
+            <a:ext cx="3104626" cy="1848913"/>
           </a:xfrm>
           <a:prstGeom prst="rect">
             <a:avLst/>
@@ -6003,8 +6003,8 @@
         </p:nvSpPr>
         <p:spPr>
           <a:xfrm>
-            <a:off x="536870" y="7850348"/>
-            <a:ext cx="3122609" cy="230087"/>
+            <a:off x="553304" y="7844870"/>
+            <a:ext cx="3104626" cy="232826"/>
           </a:xfrm>
           <a:prstGeom prst="rect">
             <a:avLst/>
@@ -6054,8 +6054,8 @@
         </p:nvSpPr>
         <p:spPr>
           <a:xfrm>
-            <a:off x="569739" y="8113304"/>
-            <a:ext cx="630000" cy="361565"/>
+            <a:off x="553304" y="8094130"/>
+            <a:ext cx="603293" cy="394435"/>
           </a:xfrm>
           <a:prstGeom prst="rect">
             <a:avLst/>
@@ -6205,8 +6205,8 @@
         </p:nvSpPr>
         <p:spPr>
           <a:xfrm>
-            <a:off x="569739" y="8496783"/>
-            <a:ext cx="630000" cy="372522"/>
+            <a:off x="553304" y="8488565"/>
+            <a:ext cx="603293" cy="391696"/>
           </a:xfrm>
           <a:prstGeom prst="rect">
             <a:avLst/>
@@ -6380,8 +6380,8 @@
         </p:nvSpPr>
         <p:spPr>
           <a:xfrm>
-            <a:off x="569739" y="8891217"/>
-            <a:ext cx="630000" cy="367043"/>
+            <a:off x="553304" y="8880261"/>
+            <a:ext cx="603293" cy="391696"/>
           </a:xfrm>
           <a:prstGeom prst="rect">
             <a:avLst/>
@@ -6555,8 +6555,8 @@
         </p:nvSpPr>
         <p:spPr>
           <a:xfrm>
-            <a:off x="569739" y="9280174"/>
-            <a:ext cx="630000" cy="372522"/>
+            <a:off x="553304" y="9271957"/>
+            <a:ext cx="603293" cy="388957"/>
           </a:xfrm>
           <a:prstGeom prst="rect">
             <a:avLst/>
@@ -6709,8 +6709,8 @@
         </p:nvSpPr>
         <p:spPr>
           <a:xfrm>
-            <a:off x="3708783" y="7850348"/>
-            <a:ext cx="3128087" cy="1840696"/>
+            <a:off x="3708783" y="7844870"/>
+            <a:ext cx="3100696" cy="1848913"/>
           </a:xfrm>
           <a:prstGeom prst="rect">
             <a:avLst/>
@@ -6741,8 +6741,8 @@
         </p:nvSpPr>
         <p:spPr>
           <a:xfrm>
-            <a:off x="3708783" y="7850348"/>
-            <a:ext cx="3128087" cy="230087"/>
+            <a:off x="3708783" y="7844870"/>
+            <a:ext cx="3100696" cy="232826"/>
           </a:xfrm>
           <a:prstGeom prst="rect">
             <a:avLst/>
@@ -6792,8 +6792,8 @@
         </p:nvSpPr>
         <p:spPr>
           <a:xfrm>
-            <a:off x="3741652" y="8113304"/>
-            <a:ext cx="810783" cy="361565"/>
+            <a:off x="3741652" y="8094130"/>
+            <a:ext cx="846049" cy="394435"/>
           </a:xfrm>
           <a:prstGeom prst="rect">
             <a:avLst/>
@@ -6967,8 +6967,8 @@
         </p:nvSpPr>
         <p:spPr>
           <a:xfrm>
-            <a:off x="3741652" y="8496783"/>
-            <a:ext cx="810783" cy="372522"/>
+            <a:off x="3741652" y="8488565"/>
+            <a:ext cx="846049" cy="391696"/>
           </a:xfrm>
           <a:prstGeom prst="rect">
             <a:avLst/>
@@ -7142,8 +7142,8 @@
         </p:nvSpPr>
         <p:spPr>
           <a:xfrm>
-            <a:off x="3741652" y="8891217"/>
-            <a:ext cx="810783" cy="367043"/>
+            <a:off x="3741652" y="8880261"/>
+            <a:ext cx="846049" cy="391696"/>
           </a:xfrm>
           <a:prstGeom prst="rect">
             <a:avLst/>
@@ -7317,8 +7317,8 @@
         </p:nvSpPr>
         <p:spPr>
           <a:xfrm>
-            <a:off x="3741652" y="9280174"/>
-            <a:ext cx="810783" cy="372522"/>
+            <a:off x="3741652" y="9271957"/>
+            <a:ext cx="846049" cy="388957"/>
           </a:xfrm>
           <a:prstGeom prst="rect">
             <a:avLst/>
@@ -7471,8 +7471,8 @@
         </p:nvSpPr>
         <p:spPr>
           <a:xfrm>
-            <a:off x="536870" y="9773217"/>
-            <a:ext cx="6300000" cy="301304"/>
+            <a:off x="553304" y="9786913"/>
+            <a:ext cx="6256174" cy="287609"/>
           </a:xfrm>
           <a:prstGeom prst="rect">
             <a:avLst/>
@@ -7503,8 +7503,8 @@
         </p:nvSpPr>
         <p:spPr>
           <a:xfrm>
-            <a:off x="569739" y="9811565"/>
-            <a:ext cx="657391" cy="224609"/>
+            <a:off x="553304" y="9786913"/>
+            <a:ext cx="698478" cy="257478"/>
           </a:xfrm>
           <a:prstGeom prst="homePlate">
             <a:avLst>
@@ -7667,8 +7667,8 @@
         </p:nvSpPr>
         <p:spPr>
           <a:xfrm>
-            <a:off x="723130" y="777913"/>
-            <a:ext cx="6294522" cy="306783"/>
+            <a:off x="723130" y="766957"/>
+            <a:ext cx="6286304" cy="288522"/>
           </a:xfrm>
           <a:prstGeom prst="rect">
             <a:avLst/>
@@ -7958,8 +7958,8 @@
         </p:nvSpPr>
         <p:spPr>
           <a:xfrm>
-            <a:off x="3955351" y="1221652"/>
-            <a:ext cx="327325" cy="175304"/>
+            <a:off x="3968658" y="1205217"/>
+            <a:ext cx="314018" cy="147913"/>
           </a:xfrm>
           <a:prstGeom prst="rect">
             <a:avLst/>
@@ -8009,8 +8009,8 @@
         </p:nvSpPr>
         <p:spPr>
           <a:xfrm>
-            <a:off x="723130" y="1451739"/>
-            <a:ext cx="4744174" cy="2120087"/>
+            <a:off x="723130" y="1445713"/>
+            <a:ext cx="4744174" cy="2167200"/>
           </a:xfrm>
           <a:prstGeom prst="rect">
             <a:avLst/>
@@ -8041,8 +8041,8 @@
         </p:nvSpPr>
         <p:spPr>
           <a:xfrm>
-            <a:off x="723130" y="1451739"/>
-            <a:ext cx="569739" cy="465652"/>
+            <a:off x="723130" y="1445713"/>
+            <a:ext cx="581609" cy="482635"/>
           </a:xfrm>
           <a:prstGeom prst="rect">
             <a:avLst/>
@@ -8092,8 +8092,8 @@
         </p:nvSpPr>
         <p:spPr>
           <a:xfrm>
-            <a:off x="723130" y="1939304"/>
-            <a:ext cx="569739" cy="728609"/>
+            <a:off x="723130" y="1928348"/>
+            <a:ext cx="581609" cy="742304"/>
           </a:xfrm>
           <a:prstGeom prst="rect">
             <a:avLst/>
@@ -8167,8 +8167,8 @@
         </p:nvSpPr>
         <p:spPr>
           <a:xfrm>
-            <a:off x="723130" y="2684348"/>
-            <a:ext cx="569739" cy="887478"/>
+            <a:off x="723130" y="2695304"/>
+            <a:ext cx="581609" cy="917609"/>
           </a:xfrm>
           <a:prstGeom prst="rect">
             <a:avLst/>
@@ -8321,8 +8321,8 @@
         </p:nvSpPr>
         <p:spPr>
           <a:xfrm>
-            <a:off x="1331217" y="1955739"/>
-            <a:ext cx="2037913" cy="235565"/>
+            <a:off x="1339435" y="1928348"/>
+            <a:ext cx="2029696" cy="257478"/>
           </a:xfrm>
           <a:prstGeom prst="rect">
             <a:avLst/>
@@ -8372,8 +8372,8 @@
         </p:nvSpPr>
         <p:spPr>
           <a:xfrm>
-            <a:off x="3396522" y="1955739"/>
-            <a:ext cx="2026957" cy="235565"/>
+            <a:off x="3440348" y="1928348"/>
+            <a:ext cx="1959652" cy="257478"/>
           </a:xfrm>
           <a:prstGeom prst="rect">
             <a:avLst/>
@@ -8602,8 +8602,8 @@
         </p:nvSpPr>
         <p:spPr>
           <a:xfrm>
-            <a:off x="1331217" y="2706261"/>
-            <a:ext cx="1134000" cy="230087"/>
+            <a:off x="1339435" y="2695304"/>
+            <a:ext cx="1121569" cy="232826"/>
           </a:xfrm>
           <a:prstGeom prst="homePlate">
             <a:avLst>
@@ -8655,8 +8655,8 @@
         </p:nvSpPr>
         <p:spPr>
           <a:xfrm>
-            <a:off x="2355652" y="2706261"/>
-            <a:ext cx="1106609" cy="230087"/>
+            <a:off x="2311826" y="2695304"/>
+            <a:ext cx="1128522" cy="232826"/>
           </a:xfrm>
           <a:prstGeom prst="chevron">
             <a:avLst>
@@ -8708,8 +8708,8 @@
         </p:nvSpPr>
         <p:spPr>
           <a:xfrm>
-            <a:off x="3352696" y="2706261"/>
-            <a:ext cx="1101130" cy="230087"/>
+            <a:off x="3352696" y="2695304"/>
+            <a:ext cx="1120304" cy="232826"/>
           </a:xfrm>
           <a:prstGeom prst="chevron">
             <a:avLst>
@@ -8761,8 +8761,8 @@
         </p:nvSpPr>
         <p:spPr>
           <a:xfrm>
-            <a:off x="4344261" y="2706261"/>
-            <a:ext cx="1095652" cy="230087"/>
+            <a:off x="4381696" y="2695304"/>
+            <a:ext cx="1085609" cy="232826"/>
           </a:xfrm>
           <a:prstGeom prst="chevron">
             <a:avLst>
@@ -9081,8 +9081,8 @@
         </p:nvSpPr>
         <p:spPr>
           <a:xfrm>
-            <a:off x="5494696" y="1572261"/>
-            <a:ext cx="147913" cy="1944783"/>
+            <a:off x="5467304" y="1572261"/>
+            <a:ext cx="175304" cy="1944783"/>
           </a:xfrm>
           <a:prstGeom prst="rightBrace">
             <a:avLst/>
@@ -9111,8 +9111,8 @@
         </p:nvSpPr>
         <p:spPr>
           <a:xfrm>
-            <a:off x="5653565" y="1435304"/>
-            <a:ext cx="1364087" cy="241043"/>
+            <a:off x="5653565" y="1445713"/>
+            <a:ext cx="1355870" cy="236113"/>
           </a:xfrm>
           <a:prstGeom prst="rect">
             <a:avLst/>
@@ -9162,8 +9162,8 @@
         </p:nvSpPr>
         <p:spPr>
           <a:xfrm>
-            <a:off x="5653565" y="1687304"/>
-            <a:ext cx="1364087" cy="1928348"/>
+            <a:off x="5653565" y="1681826"/>
+            <a:ext cx="1355870" cy="1931087"/>
           </a:xfrm>
           <a:prstGeom prst="rect">
             <a:avLst/>
@@ -9344,8 +9344,8 @@
         </p:nvSpPr>
         <p:spPr>
           <a:xfrm>
-            <a:off x="3932802" y="3780000"/>
-            <a:ext cx="606399" cy="175304"/>
+            <a:off x="3968658" y="3785478"/>
+            <a:ext cx="575560" cy="147913"/>
           </a:xfrm>
           <a:prstGeom prst="rect">
             <a:avLst/>
@@ -9395,8 +9395,8 @@
         </p:nvSpPr>
         <p:spPr>
           <a:xfrm>
-            <a:off x="723130" y="4037478"/>
-            <a:ext cx="6294522" cy="2470696"/>
+            <a:off x="723130" y="4031087"/>
+            <a:ext cx="6286304" cy="2468870"/>
           </a:xfrm>
           <a:prstGeom prst="rect">
             <a:avLst/>
@@ -9427,8 +9427,8 @@
         </p:nvSpPr>
         <p:spPr>
           <a:xfrm>
-            <a:off x="723130" y="4037478"/>
-            <a:ext cx="569739" cy="750522"/>
+            <a:off x="723130" y="4031087"/>
+            <a:ext cx="581609" cy="765130"/>
           </a:xfrm>
           <a:prstGeom prst="rect">
             <a:avLst/>
@@ -9502,8 +9502,8 @@
         </p:nvSpPr>
         <p:spPr>
           <a:xfrm>
-            <a:off x="723130" y="4809913"/>
-            <a:ext cx="569739" cy="734087"/>
+            <a:off x="723130" y="4818130"/>
+            <a:ext cx="581609" cy="728609"/>
           </a:xfrm>
           <a:prstGeom prst="rect">
             <a:avLst/>
@@ -9577,8 +9577,8 @@
         </p:nvSpPr>
         <p:spPr>
           <a:xfrm>
-            <a:off x="723130" y="5565913"/>
-            <a:ext cx="569739" cy="942261"/>
+            <a:off x="723130" y="5571391"/>
+            <a:ext cx="581609" cy="928565"/>
           </a:xfrm>
           <a:prstGeom prst="rect">
             <a:avLst/>
@@ -9652,8 +9652,8 @@
         </p:nvSpPr>
         <p:spPr>
           <a:xfrm>
-            <a:off x="1331217" y="4064870"/>
-            <a:ext cx="2810348" cy="235565"/>
+            <a:off x="1339435" y="4031087"/>
+            <a:ext cx="2848984" cy="269348"/>
           </a:xfrm>
           <a:prstGeom prst="rect">
             <a:avLst/>
@@ -9703,8 +9703,8 @@
         </p:nvSpPr>
         <p:spPr>
           <a:xfrm>
-            <a:off x="4168957" y="4064870"/>
-            <a:ext cx="2793913" cy="235565"/>
+            <a:off x="4188419" y="4031087"/>
+            <a:ext cx="2788146" cy="269348"/>
           </a:xfrm>
           <a:prstGeom prst="rect">
             <a:avLst/>
@@ -9877,8 +9877,8 @@
         </p:nvSpPr>
         <p:spPr>
           <a:xfrm>
-            <a:off x="1331217" y="4820870"/>
-            <a:ext cx="2810348" cy="230087"/>
+            <a:off x="1339435" y="4818130"/>
+            <a:ext cx="2848984" cy="235565"/>
           </a:xfrm>
           <a:prstGeom prst="rect">
             <a:avLst/>
@@ -9928,8 +9928,8 @@
         </p:nvSpPr>
         <p:spPr>
           <a:xfrm>
-            <a:off x="4168957" y="4820870"/>
-            <a:ext cx="2793913" cy="230087"/>
+            <a:off x="4188419" y="4818130"/>
+            <a:ext cx="2788146" cy="235565"/>
           </a:xfrm>
           <a:prstGeom prst="rect">
             <a:avLst/>
@@ -10102,8 +10102,8 @@
         </p:nvSpPr>
         <p:spPr>
           <a:xfrm>
-            <a:off x="1331217" y="5576870"/>
-            <a:ext cx="1407913" cy="230087"/>
+            <a:off x="1339435" y="5571391"/>
+            <a:ext cx="1406087" cy="232826"/>
           </a:xfrm>
           <a:prstGeom prst="homePlate">
             <a:avLst>
@@ -10155,8 +10155,8 @@
         </p:nvSpPr>
         <p:spPr>
           <a:xfrm>
-            <a:off x="2629565" y="5576870"/>
-            <a:ext cx="1506522" cy="230087"/>
+            <a:off x="2646000" y="5571391"/>
+            <a:ext cx="1490087" cy="232826"/>
           </a:xfrm>
           <a:prstGeom prst="chevron">
             <a:avLst>
@@ -10208,8 +10208,8 @@
         </p:nvSpPr>
         <p:spPr>
           <a:xfrm>
-            <a:off x="4026522" y="5576870"/>
-            <a:ext cx="1561304" cy="230087"/>
+            <a:off x="4040217" y="5571391"/>
+            <a:ext cx="1547194" cy="232826"/>
           </a:xfrm>
           <a:prstGeom prst="chevron">
             <a:avLst>
@@ -10261,8 +10261,8 @@
         </p:nvSpPr>
         <p:spPr>
           <a:xfrm>
-            <a:off x="5478261" y="5576870"/>
-            <a:ext cx="1501043" cy="230087"/>
+            <a:off x="5467304" y="5571391"/>
+            <a:ext cx="1509261" cy="232826"/>
           </a:xfrm>
           <a:prstGeom prst="chevron">
             <a:avLst>
@@ -10581,8 +10581,8 @@
         </p:nvSpPr>
         <p:spPr>
           <a:xfrm>
-            <a:off x="723130" y="6573913"/>
-            <a:ext cx="569739" cy="257478"/>
+            <a:off x="723130" y="6582130"/>
+            <a:ext cx="581609" cy="250174"/>
           </a:xfrm>
           <a:prstGeom prst="rect">
             <a:avLst/>
@@ -10632,8 +10632,8 @@
         </p:nvSpPr>
         <p:spPr>
           <a:xfrm>
-            <a:off x="1303826" y="6573913"/>
-            <a:ext cx="5713826" cy="257478"/>
+            <a:off x="1304739" y="6582130"/>
+            <a:ext cx="5704696" cy="250174"/>
           </a:xfrm>
           <a:prstGeom prst="rect">
             <a:avLst/>
@@ -10762,8 +10762,8 @@
         </p:nvSpPr>
         <p:spPr>
           <a:xfrm>
-            <a:off x="4224152" y="7012174"/>
-            <a:ext cx="351016" cy="175304"/>
+            <a:off x="4188419" y="7014913"/>
+            <a:ext cx="355799" cy="147913"/>
           </a:xfrm>
           <a:prstGeom prst="rect">
             <a:avLst/>
@@ -10813,8 +10813,8 @@
         </p:nvSpPr>
         <p:spPr>
           <a:xfrm>
-            <a:off x="723130" y="7253217"/>
-            <a:ext cx="6294522" cy="301304"/>
+            <a:off x="723130" y="7258696"/>
+            <a:ext cx="6286304" cy="301304"/>
           </a:xfrm>
           <a:prstGeom prst="rect">
             <a:avLst/>
@@ -10845,8 +10845,8 @@
         </p:nvSpPr>
         <p:spPr>
           <a:xfrm>
-            <a:off x="734087" y="7264174"/>
-            <a:ext cx="624522" cy="279391"/>
+            <a:off x="723130" y="7258696"/>
+            <a:ext cx="616304" cy="271174"/>
           </a:xfrm>
           <a:prstGeom prst="rect">
             <a:avLst/>
@@ -10947,8 +10947,8 @@
         </p:nvSpPr>
         <p:spPr>
           <a:xfrm>
-            <a:off x="723130" y="7631217"/>
-            <a:ext cx="6294522" cy="306783"/>
+            <a:off x="723130" y="7633957"/>
+            <a:ext cx="6286304" cy="295826"/>
           </a:xfrm>
           <a:prstGeom prst="rect">
             <a:avLst/>
@@ -10979,8 +10979,8 @@
         </p:nvSpPr>
         <p:spPr>
           <a:xfrm>
-            <a:off x="734087" y="7642174"/>
-            <a:ext cx="591652" cy="284870"/>
+            <a:off x="723130" y="7633957"/>
+            <a:ext cx="616304" cy="295826"/>
           </a:xfrm>
           <a:prstGeom prst="rect">
             <a:avLst/>
@@ -11125,7 +11125,7 @@
         <p:spPr>
           <a:xfrm>
             <a:off x="723130" y="8173565"/>
-            <a:ext cx="6294522" cy="745043"/>
+            <a:ext cx="6286304" cy="739565"/>
           </a:xfrm>
           <a:prstGeom prst="rect">
             <a:avLst/>
@@ -11156,8 +11156,8 @@
         </p:nvSpPr>
         <p:spPr>
           <a:xfrm>
-            <a:off x="734087" y="8184522"/>
-            <a:ext cx="591652" cy="723130"/>
+            <a:off x="723130" y="8173565"/>
+            <a:ext cx="616304" cy="739565"/>
           </a:xfrm>
           <a:prstGeom prst="rect">
             <a:avLst/>
@@ -11207,8 +11207,8 @@
         </p:nvSpPr>
         <p:spPr>
           <a:xfrm>
-            <a:off x="1369565" y="8200957"/>
-            <a:ext cx="1857130" cy="246522"/>
+            <a:off x="1394217" y="8203696"/>
+            <a:ext cx="1832478" cy="235565"/>
           </a:xfrm>
           <a:prstGeom prst="rect">
             <a:avLst/>
@@ -11258,8 +11258,8 @@
         </p:nvSpPr>
         <p:spPr>
           <a:xfrm>
-            <a:off x="3254087" y="8200957"/>
-            <a:ext cx="1851652" cy="246522"/>
+            <a:off x="3299891" y="8203696"/>
+            <a:ext cx="1761026" cy="235565"/>
           </a:xfrm>
           <a:prstGeom prst="rect">
             <a:avLst/>
@@ -11309,8 +11309,8 @@
         </p:nvSpPr>
         <p:spPr>
           <a:xfrm>
-            <a:off x="5133130" y="8200957"/>
-            <a:ext cx="1835217" cy="246522"/>
+            <a:off x="5163261" y="8203696"/>
+            <a:ext cx="1813304" cy="235565"/>
           </a:xfrm>
           <a:prstGeom prst="rect">
             <a:avLst/>
@@ -11611,8 +11611,8 @@
         </p:nvSpPr>
         <p:spPr>
           <a:xfrm>
-            <a:off x="723130" y="8995304"/>
-            <a:ext cx="6294522" cy="498522"/>
+            <a:off x="723130" y="8992565"/>
+            <a:ext cx="6286304" cy="498522"/>
           </a:xfrm>
           <a:prstGeom prst="rect">
             <a:avLst/>
@@ -11643,8 +11643,8 @@
         </p:nvSpPr>
         <p:spPr>
           <a:xfrm>
-            <a:off x="734087" y="9006261"/>
-            <a:ext cx="591652" cy="476609"/>
+            <a:off x="723130" y="8992565"/>
+            <a:ext cx="616304" cy="498522"/>
           </a:xfrm>
           <a:prstGeom prst="rect">
             <a:avLst/>
@@ -11945,8 +11945,8 @@
         </p:nvSpPr>
         <p:spPr>
           <a:xfrm>
-            <a:off x="723130" y="9581478"/>
-            <a:ext cx="6294522" cy="482087"/>
+            <a:off x="723130" y="9567783"/>
+            <a:ext cx="6286304" cy="478957"/>
           </a:xfrm>
           <a:prstGeom prst="rect">
             <a:avLst/>
@@ -11977,8 +11977,8 @@
         </p:nvSpPr>
         <p:spPr>
           <a:xfrm>
-            <a:off x="756000" y="9614348"/>
-            <a:ext cx="657391" cy="416348"/>
+            <a:off x="753261" y="9595174"/>
+            <a:ext cx="640957" cy="451565"/>
           </a:xfrm>
           <a:prstGeom prst="rect">
             <a:avLst/>
@@ -12230,8 +12230,8 @@
         </p:nvSpPr>
         <p:spPr>
           <a:xfrm>
-            <a:off x="536870" y="766957"/>
-            <a:ext cx="975130" cy="345130"/>
+            <a:off x="546913" y="761478"/>
+            <a:ext cx="940435" cy="350609"/>
           </a:xfrm>
           <a:prstGeom prst="rect">
             <a:avLst/>
@@ -12293,8 +12293,8 @@
         </p:nvSpPr>
         <p:spPr>
           <a:xfrm>
-            <a:off x="1522957" y="777913"/>
-            <a:ext cx="5313913" cy="323217"/>
+            <a:off x="1551522" y="788870"/>
+            <a:ext cx="5251565" cy="301304"/>
           </a:xfrm>
           <a:prstGeom prst="rect">
             <a:avLst/>
@@ -12372,8 +12372,8 @@
         </p:nvSpPr>
         <p:spPr>
           <a:xfrm>
-            <a:off x="871043" y="1051826"/>
-            <a:ext cx="27391" cy="27391"/>
+            <a:off x="854609" y="1090174"/>
+            <a:ext cx="38348" cy="0"/>
           </a:xfrm>
           <a:prstGeom prst="rect">
             <a:avLst/>
@@ -12402,8 +12402,8 @@
         </p:nvSpPr>
         <p:spPr>
           <a:xfrm>
-            <a:off x="947739" y="1051826"/>
-            <a:ext cx="27391" cy="27391"/>
+            <a:off x="932674" y="1090174"/>
+            <a:ext cx="84717" cy="0"/>
           </a:xfrm>
           <a:prstGeom prst="rect">
             <a:avLst/>
@@ -12432,8 +12432,8 @@
         </p:nvSpPr>
         <p:spPr>
           <a:xfrm>
-            <a:off x="1024435" y="1051826"/>
-            <a:ext cx="27391" cy="27391"/>
+            <a:off x="1017391" y="1090174"/>
+            <a:ext cx="0" cy="0"/>
           </a:xfrm>
           <a:prstGeom prst="rect">
             <a:avLst/>
@@ -12462,8 +12462,8 @@
         </p:nvSpPr>
         <p:spPr>
           <a:xfrm>
-            <a:off x="1101130" y="1051826"/>
-            <a:ext cx="27391" cy="27391"/>
+            <a:off x="1106609" y="1090174"/>
+            <a:ext cx="41087" cy="0"/>
           </a:xfrm>
           <a:prstGeom prst="rect">
             <a:avLst/>
@@ -12492,8 +12492,8 @@
         </p:nvSpPr>
         <p:spPr>
           <a:xfrm>
-            <a:off x="1177826" y="1051826"/>
-            <a:ext cx="27391" cy="27391"/>
+            <a:off x="1147696" y="1090174"/>
+            <a:ext cx="62609" cy="0"/>
           </a:xfrm>
           <a:prstGeom prst="rect">
             <a:avLst/>
@@ -12522,8 +12522,8 @@
         </p:nvSpPr>
         <p:spPr>
           <a:xfrm>
-            <a:off x="536870" y="1260000"/>
-            <a:ext cx="6300000" cy="306783"/>
+            <a:off x="546913" y="1262739"/>
+            <a:ext cx="6256174" cy="304043"/>
           </a:xfrm>
           <a:prstGeom prst="rect">
             <a:avLst/>
@@ -12813,8 +12813,8 @@
         </p:nvSpPr>
         <p:spPr>
           <a:xfrm>
-            <a:off x="4180927" y="1659913"/>
-            <a:ext cx="606399" cy="175304"/>
+            <a:off x="4221000" y="1698261"/>
+            <a:ext cx="547826" cy="147913"/>
           </a:xfrm>
           <a:prstGeom prst="rect">
             <a:avLst/>
@@ -12864,8 +12864,8 @@
         </p:nvSpPr>
         <p:spPr>
           <a:xfrm>
-            <a:off x="536870" y="1933826"/>
-            <a:ext cx="6300000" cy="16435"/>
+            <a:off x="546913" y="1939304"/>
+            <a:ext cx="6256174" cy="0"/>
           </a:xfrm>
           <a:prstGeom prst="rect">
             <a:avLst/>
@@ -12894,8 +12894,8 @@
         </p:nvSpPr>
         <p:spPr>
           <a:xfrm>
-            <a:off x="536870" y="1950261"/>
-            <a:ext cx="580696" cy="471130"/>
+            <a:off x="546913" y="1939304"/>
+            <a:ext cx="559696" cy="482087"/>
           </a:xfrm>
           <a:prstGeom prst="rect">
             <a:avLst/>
@@ -12945,8 +12945,8 @@
         </p:nvSpPr>
         <p:spPr>
           <a:xfrm>
-            <a:off x="536870" y="2421391"/>
-            <a:ext cx="580696" cy="602609"/>
+            <a:off x="546913" y="2421391"/>
+            <a:ext cx="559696" cy="621783"/>
           </a:xfrm>
           <a:prstGeom prst="rect">
             <a:avLst/>
@@ -13068,8 +13068,8 @@
         </p:nvSpPr>
         <p:spPr>
           <a:xfrm>
-            <a:off x="536870" y="3024000"/>
-            <a:ext cx="580696" cy="438261"/>
+            <a:off x="546913" y="3043174"/>
+            <a:ext cx="559696" cy="407217"/>
           </a:xfrm>
           <a:prstGeom prst="rect">
             <a:avLst/>
@@ -13242,8 +13242,8 @@
         </p:nvSpPr>
         <p:spPr>
           <a:xfrm>
-            <a:off x="1150435" y="2383043"/>
-            <a:ext cx="2826783" cy="202696"/>
+            <a:off x="1147696" y="2361130"/>
+            <a:ext cx="2829704" cy="216391"/>
           </a:xfrm>
           <a:prstGeom prst="rect">
             <a:avLst/>
@@ -13293,8 +13293,8 @@
         </p:nvSpPr>
         <p:spPr>
           <a:xfrm>
-            <a:off x="4004609" y="2383043"/>
-            <a:ext cx="2815826" cy="202696"/>
+            <a:off x="3977400" y="2361130"/>
+            <a:ext cx="2825687" cy="216391"/>
           </a:xfrm>
           <a:prstGeom prst="rect">
             <a:avLst/>
@@ -13459,8 +13459,8 @@
         </p:nvSpPr>
         <p:spPr>
           <a:xfrm>
-            <a:off x="1188783" y="3051391"/>
-            <a:ext cx="1177826" cy="180783"/>
+            <a:off x="1210304" y="3043174"/>
+            <a:ext cx="1156304" cy="202696"/>
           </a:xfrm>
           <a:prstGeom prst="rect">
             <a:avLst/>
@@ -13557,8 +13557,8 @@
         </p:nvSpPr>
         <p:spPr>
           <a:xfrm>
-            <a:off x="1188783" y="3265043"/>
-            <a:ext cx="1177826" cy="175304"/>
+            <a:off x="1210304" y="3245870"/>
+            <a:ext cx="1156304" cy="204522"/>
           </a:xfrm>
           <a:prstGeom prst="rect">
             <a:avLst/>
@@ -13655,8 +13655,8 @@
         </p:nvSpPr>
         <p:spPr>
           <a:xfrm>
-            <a:off x="1396957" y="3473217"/>
-            <a:ext cx="4601739" cy="186261"/>
+            <a:off x="1380913" y="3450391"/>
+            <a:ext cx="4635130" cy="211826"/>
           </a:xfrm>
           <a:prstGeom prst="rect">
             <a:avLst/>
@@ -13685,8 +13685,8 @@
         </p:nvSpPr>
         <p:spPr>
           <a:xfrm>
-            <a:off x="1440783" y="3462261"/>
-            <a:ext cx="4514087" cy="153391"/>
+            <a:off x="1487348" y="3450391"/>
+            <a:ext cx="4464783" cy="118696"/>
           </a:xfrm>
           <a:prstGeom prst="rect">
             <a:avLst/>
@@ -13715,8 +13715,8 @@
         </p:nvSpPr>
         <p:spPr>
           <a:xfrm>
-            <a:off x="3336261" y="3604696"/>
-            <a:ext cx="723130" cy="38348"/>
+            <a:off x="3352878" y="3569087"/>
+            <a:ext cx="731165" cy="93130"/>
           </a:xfrm>
           <a:prstGeom prst="rect">
             <a:avLst/>
@@ -13745,8 +13745,8 @@
         </p:nvSpPr>
         <p:spPr>
           <a:xfrm rot="10800000">
-            <a:off x="3621130" y="3643043"/>
-            <a:ext cx="153391" cy="82174"/>
+            <a:off x="3601500" y="3662217"/>
+            <a:ext cx="203152" cy="63000"/>
           </a:xfrm>
           <a:prstGeom prst="triangle">
             <a:avLst/>
@@ -13775,8 +13775,8 @@
         </p:nvSpPr>
         <p:spPr>
           <a:xfrm>
-            <a:off x="536870" y="3670435"/>
-            <a:ext cx="3122609" cy="2026957"/>
+            <a:off x="546913" y="3662217"/>
+            <a:ext cx="3112565" cy="2037913"/>
           </a:xfrm>
           <a:prstGeom prst="rect">
             <a:avLst/>
@@ -13807,8 +13807,8 @@
         </p:nvSpPr>
         <p:spPr>
           <a:xfrm>
-            <a:off x="536870" y="3670435"/>
-            <a:ext cx="3122609" cy="246522"/>
+            <a:off x="546913" y="3662217"/>
+            <a:ext cx="3112565" cy="249261"/>
           </a:xfrm>
           <a:prstGeom prst="rect">
             <a:avLst/>
@@ -13858,8 +13858,8 @@
         </p:nvSpPr>
         <p:spPr>
           <a:xfrm>
-            <a:off x="569739" y="3938870"/>
-            <a:ext cx="739565" cy="558783"/>
+            <a:off x="546913" y="3930652"/>
+            <a:ext cx="765130" cy="575217"/>
           </a:xfrm>
           <a:prstGeom prst="rect">
             <a:avLst/>
@@ -13888,8 +13888,8 @@
         </p:nvSpPr>
         <p:spPr>
           <a:xfrm>
-            <a:off x="659724" y="3982696"/>
-            <a:ext cx="559596" cy="186261"/>
+            <a:off x="676565" y="3974478"/>
+            <a:ext cx="533739" cy="169826"/>
           </a:xfrm>
           <a:prstGeom prst="rect">
             <a:avLst/>
@@ -14110,8 +14110,8 @@
         </p:nvSpPr>
         <p:spPr>
           <a:xfrm>
-            <a:off x="569739" y="4519565"/>
-            <a:ext cx="739565" cy="558783"/>
+            <a:off x="546913" y="4505870"/>
+            <a:ext cx="765130" cy="575217"/>
           </a:xfrm>
           <a:prstGeom prst="rect">
             <a:avLst/>
@@ -14140,8 +14140,8 @@
         </p:nvSpPr>
         <p:spPr>
           <a:xfrm>
-            <a:off x="659724" y="4563391"/>
-            <a:ext cx="559596" cy="186261"/>
+            <a:off x="676565" y="4563391"/>
+            <a:ext cx="533739" cy="156130"/>
           </a:xfrm>
           <a:prstGeom prst="rect">
             <a:avLst/>
@@ -14362,8 +14362,8 @@
         </p:nvSpPr>
         <p:spPr>
           <a:xfrm>
-            <a:off x="569739" y="5100261"/>
-            <a:ext cx="739565" cy="569739"/>
+            <a:off x="546913" y="5081087"/>
+            <a:ext cx="765130" cy="602609"/>
           </a:xfrm>
           <a:prstGeom prst="rect">
             <a:avLst/>
@@ -14392,8 +14392,8 @@
         </p:nvSpPr>
         <p:spPr>
           <a:xfrm>
-            <a:off x="659724" y="5144087"/>
-            <a:ext cx="559596" cy="186261"/>
+            <a:off x="676565" y="5124913"/>
+            <a:ext cx="533739" cy="205435"/>
           </a:xfrm>
           <a:prstGeom prst="rect">
             <a:avLst/>
@@ -14621,8 +14621,8 @@
         </p:nvSpPr>
         <p:spPr>
           <a:xfrm>
-            <a:off x="3708783" y="3670435"/>
-            <a:ext cx="3128087" cy="2026957"/>
+            <a:off x="3713870" y="3662217"/>
+            <a:ext cx="3089217" cy="2037913"/>
           </a:xfrm>
           <a:prstGeom prst="rect">
             <a:avLst/>
@@ -14653,8 +14653,8 @@
         </p:nvSpPr>
         <p:spPr>
           <a:xfrm>
-            <a:off x="3708783" y="3670435"/>
-            <a:ext cx="3128087" cy="246522"/>
+            <a:off x="3713870" y="3662217"/>
+            <a:ext cx="3089217" cy="249261"/>
           </a:xfrm>
           <a:prstGeom prst="rect">
             <a:avLst/>
@@ -14704,8 +14704,8 @@
         </p:nvSpPr>
         <p:spPr>
           <a:xfrm>
-            <a:off x="3741652" y="3938870"/>
-            <a:ext cx="734087" cy="558783"/>
+            <a:off x="3713870" y="3930652"/>
+            <a:ext cx="758035" cy="575217"/>
           </a:xfrm>
           <a:prstGeom prst="rect">
             <a:avLst/>
@@ -14734,8 +14734,8 @@
         </p:nvSpPr>
         <p:spPr>
           <a:xfrm>
-            <a:off x="3828897" y="3982696"/>
-            <a:ext cx="559596" cy="186261"/>
+            <a:off x="3804652" y="3974478"/>
+            <a:ext cx="592748" cy="169826"/>
           </a:xfrm>
           <a:prstGeom prst="rect">
             <a:avLst/>
@@ -14956,8 +14956,8 @@
         </p:nvSpPr>
         <p:spPr>
           <a:xfrm>
-            <a:off x="3741652" y="4519565"/>
-            <a:ext cx="734087" cy="558783"/>
+            <a:off x="3713870" y="4505870"/>
+            <a:ext cx="758035" cy="575217"/>
           </a:xfrm>
           <a:prstGeom prst="rect">
             <a:avLst/>
@@ -14986,8 +14986,8 @@
         </p:nvSpPr>
         <p:spPr>
           <a:xfrm>
-            <a:off x="3828897" y="4563391"/>
-            <a:ext cx="559596" cy="186261"/>
+            <a:off x="3804652" y="4563391"/>
+            <a:ext cx="592748" cy="156130"/>
           </a:xfrm>
           <a:prstGeom prst="rect">
             <a:avLst/>
@@ -15236,8 +15236,8 @@
         </p:nvSpPr>
         <p:spPr>
           <a:xfrm>
-            <a:off x="3741652" y="5100261"/>
-            <a:ext cx="734087" cy="569739"/>
+            <a:off x="3713870" y="5081087"/>
+            <a:ext cx="758035" cy="602609"/>
           </a:xfrm>
           <a:prstGeom prst="rect">
             <a:avLst/>
@@ -15266,8 +15266,8 @@
         </p:nvSpPr>
         <p:spPr>
           <a:xfrm>
-            <a:off x="3828897" y="5144087"/>
-            <a:ext cx="559596" cy="186261"/>
+            <a:off x="3804652" y="5124913"/>
+            <a:ext cx="592748" cy="205435"/>
           </a:xfrm>
           <a:prstGeom prst="rect">
             <a:avLst/>
@@ -15542,8 +15542,8 @@
         </p:nvSpPr>
         <p:spPr>
           <a:xfrm>
-            <a:off x="3355467" y="5850783"/>
-            <a:ext cx="327325" cy="175304"/>
+            <a:off x="3352878" y="5861739"/>
+            <a:ext cx="360991" cy="147913"/>
           </a:xfrm>
           <a:prstGeom prst="rect">
             <a:avLst/>
@@ -15593,8 +15593,8 @@
         </p:nvSpPr>
         <p:spPr>
           <a:xfrm>
-            <a:off x="3726618" y="5850783"/>
-            <a:ext cx="351016" cy="175304"/>
+            <a:off x="3713870" y="5861739"/>
+            <a:ext cx="370174" cy="147913"/>
           </a:xfrm>
           <a:prstGeom prst="rect">
             <a:avLst/>
@@ -15644,8 +15644,8 @@
         </p:nvSpPr>
         <p:spPr>
           <a:xfrm>
-            <a:off x="536870" y="6102783"/>
-            <a:ext cx="6300000" cy="273913"/>
+            <a:off x="546913" y="6089087"/>
+            <a:ext cx="6256174" cy="298565"/>
           </a:xfrm>
           <a:prstGeom prst="rect">
             <a:avLst/>
@@ -15676,8 +15676,8 @@
         </p:nvSpPr>
         <p:spPr>
           <a:xfrm>
-            <a:off x="547826" y="6113739"/>
-            <a:ext cx="624522" cy="252000"/>
+            <a:off x="546913" y="6119217"/>
+            <a:ext cx="600783" cy="243783"/>
           </a:xfrm>
           <a:prstGeom prst="rect">
             <a:avLst/>
@@ -15778,8 +15778,8 @@
         </p:nvSpPr>
         <p:spPr>
           <a:xfrm>
-            <a:off x="536870" y="6458870"/>
-            <a:ext cx="580696" cy="646435"/>
+            <a:off x="546913" y="6458870"/>
+            <a:ext cx="559696" cy="638217"/>
           </a:xfrm>
           <a:prstGeom prst="rect">
             <a:avLst/>
@@ -15853,8 +15853,8 @@
         </p:nvSpPr>
         <p:spPr>
           <a:xfrm>
-            <a:off x="536870" y="7116261"/>
-            <a:ext cx="580696" cy="810783"/>
+            <a:off x="546913" y="7124478"/>
+            <a:ext cx="559696" cy="799826"/>
           </a:xfrm>
           <a:prstGeom prst="rect">
             <a:avLst/>
@@ -15883,8 +15883,8 @@
         </p:nvSpPr>
         <p:spPr>
           <a:xfrm>
-            <a:off x="657188" y="7280609"/>
-            <a:ext cx="340059" cy="186261"/>
+            <a:off x="641870" y="7308913"/>
+            <a:ext cx="375522" cy="160696"/>
           </a:xfrm>
           <a:prstGeom prst="rect">
             <a:avLst/>
@@ -16053,8 +16053,8 @@
         </p:nvSpPr>
         <p:spPr>
           <a:xfrm>
-            <a:off x="536870" y="7938000"/>
-            <a:ext cx="580696" cy="1057304"/>
+            <a:off x="546913" y="7924304"/>
+            <a:ext cx="559696" cy="1065522"/>
           </a:xfrm>
           <a:prstGeom prst="rect">
             <a:avLst/>
@@ -16083,8 +16083,8 @@
         </p:nvSpPr>
         <p:spPr>
           <a:xfrm>
-            <a:off x="657188" y="8102348"/>
-            <a:ext cx="340059" cy="186261"/>
+            <a:off x="641870" y="8102348"/>
+            <a:ext cx="375522" cy="142435"/>
           </a:xfrm>
           <a:prstGeom prst="rect">
             <a:avLst/>
@@ -16253,8 +16253,8 @@
         </p:nvSpPr>
         <p:spPr>
           <a:xfrm>
-            <a:off x="1150435" y="6475304"/>
-            <a:ext cx="2826783" cy="175304"/>
+            <a:off x="1147696" y="6458870"/>
+            <a:ext cx="2829704" cy="216391"/>
           </a:xfrm>
           <a:prstGeom prst="rect">
             <a:avLst/>
@@ -16304,8 +16304,8 @@
         </p:nvSpPr>
         <p:spPr>
           <a:xfrm>
-            <a:off x="4004609" y="6475304"/>
-            <a:ext cx="2815826" cy="175304"/>
+            <a:off x="3977400" y="6458870"/>
+            <a:ext cx="2825687" cy="216391"/>
           </a:xfrm>
           <a:prstGeom prst="rect">
             <a:avLst/>
@@ -16478,8 +16478,8 @@
         </p:nvSpPr>
         <p:spPr>
           <a:xfrm>
-            <a:off x="1150435" y="7132696"/>
-            <a:ext cx="4546957" cy="235565"/>
+            <a:off x="1147696" y="7124478"/>
+            <a:ext cx="4538739" cy="243783"/>
           </a:xfrm>
           <a:prstGeom prst="rect">
             <a:avLst/>
@@ -16636,8 +16636,8 @@
         </p:nvSpPr>
         <p:spPr>
           <a:xfrm>
-            <a:off x="5741217" y="7127217"/>
-            <a:ext cx="1079217" cy="783391"/>
+            <a:off x="5749435" y="7124478"/>
+            <a:ext cx="1053652" cy="799826"/>
           </a:xfrm>
           <a:prstGeom prst="rect">
             <a:avLst/>
@@ -16689,8 +16689,8 @@
         </p:nvSpPr>
         <p:spPr>
           <a:xfrm>
-            <a:off x="1150435" y="7954435"/>
-            <a:ext cx="5686435" cy="208174"/>
+            <a:off x="1147696" y="7924304"/>
+            <a:ext cx="5655391" cy="235565"/>
           </a:xfrm>
           <a:prstGeom prst="rect">
             <a:avLst/>
@@ -16740,8 +16740,8 @@
         </p:nvSpPr>
         <p:spPr>
           <a:xfrm>
-            <a:off x="1150435" y="8173565"/>
-            <a:ext cx="1879043" cy="219130"/>
+            <a:off x="1147696" y="8159870"/>
+            <a:ext cx="1865839" cy="213652"/>
           </a:xfrm>
           <a:prstGeom prst="rect">
             <a:avLst/>
@@ -16791,8 +16791,8 @@
         </p:nvSpPr>
         <p:spPr>
           <a:xfrm>
-            <a:off x="3056870" y="8173565"/>
-            <a:ext cx="1868087" cy="219130"/>
+            <a:off x="3013535" y="8159870"/>
+            <a:ext cx="1948376" cy="213652"/>
           </a:xfrm>
           <a:prstGeom prst="rect">
             <a:avLst/>
@@ -16842,8 +16842,8 @@
         </p:nvSpPr>
         <p:spPr>
           <a:xfrm>
-            <a:off x="4952348" y="8173565"/>
-            <a:ext cx="1868087" cy="219130"/>
+            <a:off x="4961911" y="8159870"/>
+            <a:ext cx="1841176" cy="213652"/>
           </a:xfrm>
           <a:prstGeom prst="rect">
             <a:avLst/>
@@ -17228,8 +17228,8 @@
         </p:nvSpPr>
         <p:spPr>
           <a:xfrm>
-            <a:off x="536870" y="9061043"/>
-            <a:ext cx="6300000" cy="635478"/>
+            <a:off x="546913" y="9055017"/>
+            <a:ext cx="6256174" cy="638765"/>
           </a:xfrm>
           <a:prstGeom prst="rect">
             <a:avLst/>
@@ -17260,8 +17260,8 @@
         </p:nvSpPr>
         <p:spPr>
           <a:xfrm>
-            <a:off x="536870" y="9061043"/>
-            <a:ext cx="591652" cy="635478"/>
+            <a:off x="546913" y="9055017"/>
+            <a:ext cx="600783" cy="638765"/>
           </a:xfrm>
           <a:prstGeom prst="rect">
             <a:avLst/>
@@ -17311,8 +17311,8 @@
         </p:nvSpPr>
         <p:spPr>
           <a:xfrm>
-            <a:off x="1161391" y="9093913"/>
-            <a:ext cx="2799391" cy="230087"/>
+            <a:off x="1147696" y="9055017"/>
+            <a:ext cx="2829704" cy="268983"/>
           </a:xfrm>
           <a:prstGeom prst="rect">
             <a:avLst/>
@@ -17362,8 +17362,8 @@
         </p:nvSpPr>
         <p:spPr>
           <a:xfrm>
-            <a:off x="3988174" y="9093913"/>
-            <a:ext cx="2810348" cy="230087"/>
+            <a:off x="3977400" y="9055017"/>
+            <a:ext cx="2825687" cy="268983"/>
           </a:xfrm>
           <a:prstGeom prst="rect">
             <a:avLst/>
@@ -17564,8 +17564,8 @@
         </p:nvSpPr>
         <p:spPr>
           <a:xfrm>
-            <a:off x="536870" y="9789652"/>
-            <a:ext cx="6300000" cy="301304"/>
+            <a:off x="546913" y="9795130"/>
+            <a:ext cx="6256174" cy="273913"/>
           </a:xfrm>
           <a:prstGeom prst="rect">
             <a:avLst/>
@@ -17596,8 +17596,8 @@
         </p:nvSpPr>
         <p:spPr>
           <a:xfrm>
-            <a:off x="569739" y="9828000"/>
-            <a:ext cx="657391" cy="224609"/>
+            <a:off x="546913" y="9795130"/>
+            <a:ext cx="663391" cy="243783"/>
           </a:xfrm>
           <a:prstGeom prst="homePlate">
             <a:avLst>
@@ -17760,8 +17760,8 @@
         </p:nvSpPr>
         <p:spPr>
           <a:xfrm>
-            <a:off x="723130" y="777913"/>
-            <a:ext cx="6294522" cy="306783"/>
+            <a:off x="723130" y="766957"/>
+            <a:ext cx="6283565" cy="288522"/>
           </a:xfrm>
           <a:prstGeom prst="rect">
             <a:avLst/>
@@ -18051,8 +18051,8 @@
         </p:nvSpPr>
         <p:spPr>
           <a:xfrm>
-            <a:off x="4025603" y="1221652"/>
-            <a:ext cx="351016" cy="175304"/>
+            <a:off x="3985435" y="1210696"/>
+            <a:ext cx="391183" cy="147913"/>
           </a:xfrm>
           <a:prstGeom prst="rect">
             <a:avLst/>
@@ -18102,8 +18102,8 @@
         </p:nvSpPr>
         <p:spPr>
           <a:xfrm>
-            <a:off x="723130" y="1451739"/>
-            <a:ext cx="6294522" cy="317739"/>
+            <a:off x="723130" y="1449000"/>
+            <a:ext cx="6283565" cy="317739"/>
           </a:xfrm>
           <a:prstGeom prst="rect">
             <a:avLst/>
@@ -18134,8 +18134,8 @@
         </p:nvSpPr>
         <p:spPr>
           <a:xfrm>
-            <a:off x="734087" y="1462696"/>
-            <a:ext cx="591652" cy="295826"/>
+            <a:off x="723130" y="1449000"/>
+            <a:ext cx="608087" cy="317739"/>
           </a:xfrm>
           <a:prstGeom prst="rect">
             <a:avLst/>
@@ -18232,8 +18232,8 @@
         </p:nvSpPr>
         <p:spPr>
           <a:xfrm>
-            <a:off x="723130" y="1846174"/>
-            <a:ext cx="6294522" cy="756000"/>
+            <a:off x="723130" y="1843435"/>
+            <a:ext cx="6283565" cy="756000"/>
           </a:xfrm>
           <a:prstGeom prst="rect">
             <a:avLst/>
@@ -18264,8 +18264,8 @@
         </p:nvSpPr>
         <p:spPr>
           <a:xfrm>
-            <a:off x="734087" y="1857130"/>
-            <a:ext cx="591652" cy="734087"/>
+            <a:off x="723130" y="1843435"/>
+            <a:ext cx="608087" cy="756000"/>
           </a:xfrm>
           <a:prstGeom prst="rect">
             <a:avLst/>
@@ -18315,8 +18315,8 @@
         </p:nvSpPr>
         <p:spPr>
           <a:xfrm>
-            <a:off x="1369565" y="1884522"/>
-            <a:ext cx="2788435" cy="224609"/>
+            <a:off x="1378878" y="1843435"/>
+            <a:ext cx="2779122" cy="268435"/>
           </a:xfrm>
           <a:prstGeom prst="rect">
             <a:avLst/>
@@ -18366,8 +18366,8 @@
         </p:nvSpPr>
         <p:spPr>
           <a:xfrm>
-            <a:off x="4185391" y="1884522"/>
-            <a:ext cx="2782957" cy="224609"/>
+            <a:off x="4185391" y="1843435"/>
+            <a:ext cx="2791174" cy="268435"/>
           </a:xfrm>
           <a:prstGeom prst="rect">
             <a:avLst/>
@@ -18597,7 +18597,7 @@
         <p:spPr>
           <a:xfrm>
             <a:off x="723130" y="2678870"/>
-            <a:ext cx="6294522" cy="323217"/>
+            <a:ext cx="6283565" cy="320478"/>
           </a:xfrm>
           <a:prstGeom prst="rect">
             <a:avLst/>
@@ -18628,8 +18628,8 @@
         </p:nvSpPr>
         <p:spPr>
           <a:xfrm>
-            <a:off x="734087" y="2689826"/>
-            <a:ext cx="591652" cy="301304"/>
+            <a:off x="723130" y="2678870"/>
+            <a:ext cx="608087" cy="320478"/>
           </a:xfrm>
           <a:prstGeom prst="rect">
             <a:avLst/>
@@ -18679,8 +18679,8 @@
         </p:nvSpPr>
         <p:spPr>
           <a:xfrm>
-            <a:off x="1369565" y="2711739"/>
-            <a:ext cx="5615217" cy="257478"/>
+            <a:off x="1378878" y="2714478"/>
+            <a:ext cx="5597687" cy="246522"/>
           </a:xfrm>
           <a:prstGeom prst="rect">
             <a:avLst/>
@@ -18756,8 +18756,8 @@
         </p:nvSpPr>
         <p:spPr>
           <a:xfrm>
-            <a:off x="723130" y="3078783"/>
-            <a:ext cx="6294522" cy="766957"/>
+            <a:off x="723130" y="3076043"/>
+            <a:ext cx="6283565" cy="758739"/>
           </a:xfrm>
           <a:prstGeom prst="rect">
             <a:avLst/>
@@ -18788,8 +18788,8 @@
         </p:nvSpPr>
         <p:spPr>
           <a:xfrm>
-            <a:off x="734087" y="3089739"/>
-            <a:ext cx="591652" cy="745043"/>
+            <a:off x="723130" y="3076043"/>
+            <a:ext cx="608087" cy="758739"/>
           </a:xfrm>
           <a:prstGeom prst="rect">
             <a:avLst/>
@@ -18839,8 +18839,8 @@
         </p:nvSpPr>
         <p:spPr>
           <a:xfrm>
-            <a:off x="1369565" y="3117130"/>
-            <a:ext cx="1857130" cy="219130"/>
+            <a:off x="1378878" y="3108913"/>
+            <a:ext cx="1835491" cy="232826"/>
           </a:xfrm>
           <a:prstGeom prst="rect">
             <a:avLst/>
@@ -18890,8 +18890,8 @@
         </p:nvSpPr>
         <p:spPr>
           <a:xfrm>
-            <a:off x="3254087" y="3117130"/>
-            <a:ext cx="1851652" cy="219130"/>
+            <a:off x="3214370" y="3108913"/>
+            <a:ext cx="1911386" cy="232826"/>
           </a:xfrm>
           <a:prstGeom prst="rect">
             <a:avLst/>
@@ -18941,8 +18941,8 @@
         </p:nvSpPr>
         <p:spPr>
           <a:xfrm>
-            <a:off x="5133130" y="3117130"/>
-            <a:ext cx="1835217" cy="219130"/>
+            <a:off x="5125756" y="3108913"/>
+            <a:ext cx="1850809" cy="232826"/>
           </a:xfrm>
           <a:prstGeom prst="rect">
             <a:avLst/>
@@ -19187,8 +19187,8 @@
         </p:nvSpPr>
         <p:spPr>
           <a:xfrm>
-            <a:off x="1873565" y="3856696"/>
-            <a:ext cx="4601739" cy="175304"/>
+            <a:off x="1898217" y="3834783"/>
+            <a:ext cx="4543164" cy="197217"/>
           </a:xfrm>
           <a:prstGeom prst="rect">
             <a:avLst/>
@@ -19217,8 +19217,8 @@
         </p:nvSpPr>
         <p:spPr>
           <a:xfrm>
-            <a:off x="1917391" y="3845739"/>
-            <a:ext cx="4514087" cy="142435"/>
+            <a:off x="1898217" y="3834783"/>
+            <a:ext cx="4543164" cy="104087"/>
           </a:xfrm>
           <a:prstGeom prst="rect">
             <a:avLst/>
@@ -19247,8 +19247,8 @@
         </p:nvSpPr>
         <p:spPr>
           <a:xfrm>
-            <a:off x="3812870" y="3977217"/>
-            <a:ext cx="723130" cy="38348"/>
+            <a:off x="3845130" y="3938870"/>
+            <a:ext cx="659334" cy="76696"/>
           </a:xfrm>
           <a:prstGeom prst="rect">
             <a:avLst/>
@@ -19277,8 +19277,8 @@
         </p:nvSpPr>
         <p:spPr>
           <a:xfrm rot="10800000">
-            <a:off x="4097739" y="4015565"/>
-            <a:ext cx="153391" cy="82174"/>
+            <a:off x="4108223" y="4015565"/>
+            <a:ext cx="142907" cy="71217"/>
           </a:xfrm>
           <a:prstGeom prst="triangle">
             <a:avLst/>
@@ -21241,8 +21241,8 @@
         </p:nvSpPr>
         <p:spPr>
           <a:xfrm>
-            <a:off x="4587618" y="6716348"/>
-            <a:ext cx="606399" cy="175304"/>
+            <a:off x="4587618" y="6727304"/>
+            <a:ext cx="606399" cy="145174"/>
           </a:xfrm>
           <a:prstGeom prst="rect">
             <a:avLst/>
@@ -21292,8 +21292,8 @@
         </p:nvSpPr>
         <p:spPr>
           <a:xfrm>
-            <a:off x="723130" y="6979304"/>
-            <a:ext cx="6294522" cy="2711739"/>
+            <a:off x="723130" y="6976565"/>
+            <a:ext cx="6283565" cy="2706261"/>
           </a:xfrm>
           <a:prstGeom prst="rect">
             <a:avLst/>
@@ -21324,8 +21324,8 @@
         </p:nvSpPr>
         <p:spPr>
           <a:xfrm>
-            <a:off x="723130" y="6979304"/>
-            <a:ext cx="608087" cy="1457217"/>
+            <a:off x="723130" y="6976565"/>
+            <a:ext cx="608087" cy="1462696"/>
           </a:xfrm>
           <a:prstGeom prst="rect">
             <a:avLst/>
@@ -21399,8 +21399,8 @@
         </p:nvSpPr>
         <p:spPr>
           <a:xfrm>
-            <a:off x="723130" y="8458435"/>
-            <a:ext cx="608087" cy="1232609"/>
+            <a:off x="723130" y="8461174"/>
+            <a:ext cx="608087" cy="1221652"/>
           </a:xfrm>
           <a:prstGeom prst="rect">
             <a:avLst/>
@@ -21474,8 +21474,8 @@
         </p:nvSpPr>
         <p:spPr>
           <a:xfrm>
-            <a:off x="1369565" y="7012174"/>
-            <a:ext cx="5615217" cy="230087"/>
+            <a:off x="1378878" y="7006696"/>
+            <a:ext cx="5597687" cy="232826"/>
           </a:xfrm>
           <a:prstGeom prst="rect">
             <a:avLst/>
@@ -21525,8 +21525,8 @@
         </p:nvSpPr>
         <p:spPr>
           <a:xfrm>
-            <a:off x="1588696" y="7045043"/>
-            <a:ext cx="602609" cy="175304"/>
+            <a:off x="1580478" y="7036826"/>
+            <a:ext cx="591104" cy="172565"/>
           </a:xfrm>
           <a:prstGeom prst="rect">
             <a:avLst/>
@@ -21623,8 +21623,8 @@
         </p:nvSpPr>
         <p:spPr>
           <a:xfrm>
-            <a:off x="1369565" y="7253217"/>
-            <a:ext cx="1857130" cy="235565"/>
+            <a:off x="1378878" y="7239522"/>
+            <a:ext cx="1835491" cy="235565"/>
           </a:xfrm>
           <a:prstGeom prst="rect">
             <a:avLst/>
@@ -21674,8 +21674,8 @@
         </p:nvSpPr>
         <p:spPr>
           <a:xfrm>
-            <a:off x="3254087" y="7253217"/>
-            <a:ext cx="1851652" cy="235565"/>
+            <a:off x="3214370" y="7239522"/>
+            <a:ext cx="1911386" cy="235565"/>
           </a:xfrm>
           <a:prstGeom prst="rect">
             <a:avLst/>
@@ -21725,8 +21725,8 @@
         </p:nvSpPr>
         <p:spPr>
           <a:xfrm>
-            <a:off x="5133130" y="7253217"/>
-            <a:ext cx="1835217" cy="235565"/>
+            <a:off x="5125756" y="7239522"/>
+            <a:ext cx="1850809" cy="235565"/>
           </a:xfrm>
           <a:prstGeom prst="rect">
             <a:avLst/>
@@ -22055,8 +22055,8 @@
         </p:nvSpPr>
         <p:spPr>
           <a:xfrm>
-            <a:off x="1402435" y="7987304"/>
-            <a:ext cx="514957" cy="142435"/>
+            <a:off x="1424348" y="7984565"/>
+            <a:ext cx="473870" cy="142435"/>
           </a:xfrm>
           <a:prstGeom prst="rect">
             <a:avLst/>
@@ -22153,8 +22153,8 @@
         </p:nvSpPr>
         <p:spPr>
           <a:xfrm>
-            <a:off x="3286957" y="7987304"/>
-            <a:ext cx="514957" cy="142435"/>
+            <a:off x="3286957" y="7984565"/>
+            <a:ext cx="558174" cy="142435"/>
           </a:xfrm>
           <a:prstGeom prst="rect">
             <a:avLst/>
@@ -22251,8 +22251,8 @@
         </p:nvSpPr>
         <p:spPr>
           <a:xfrm>
-            <a:off x="5166000" y="7987304"/>
-            <a:ext cx="514957" cy="142435"/>
+            <a:off x="5125756" y="7984565"/>
+            <a:ext cx="575986" cy="142435"/>
           </a:xfrm>
           <a:prstGeom prst="rect">
             <a:avLst/>
@@ -22370,8 +22370,8 @@
         </p:nvSpPr>
         <p:spPr>
           <a:xfrm>
-            <a:off x="1369565" y="8458435"/>
-            <a:ext cx="5615217" cy="224609"/>
+            <a:off x="1378878" y="8461174"/>
+            <a:ext cx="5597687" cy="232826"/>
           </a:xfrm>
           <a:prstGeom prst="rect">
             <a:avLst/>
@@ -22421,8 +22421,8 @@
         </p:nvSpPr>
         <p:spPr>
           <a:xfrm>
-            <a:off x="1840696" y="8485826"/>
-            <a:ext cx="602609" cy="175304"/>
+            <a:off x="1843435" y="8494043"/>
+            <a:ext cx="580696" cy="169826"/>
           </a:xfrm>
           <a:prstGeom prst="rect">
             <a:avLst/>
@@ -22519,8 +22519,8 @@
         </p:nvSpPr>
         <p:spPr>
           <a:xfrm>
-            <a:off x="1369565" y="8694000"/>
-            <a:ext cx="2772000" cy="235565"/>
+            <a:off x="1378878" y="8694000"/>
+            <a:ext cx="2729345" cy="235565"/>
           </a:xfrm>
           <a:prstGeom prst="rect">
             <a:avLst/>
@@ -22571,7 +22571,7 @@
         <p:spPr>
           <a:xfrm>
             <a:off x="4168957" y="8694000"/>
-            <a:ext cx="2799391" cy="235565"/>
+            <a:ext cx="2807609" cy="235565"/>
           </a:xfrm>
           <a:prstGeom prst="rect">
             <a:avLst/>
@@ -22793,8 +22793,8 @@
         </p:nvSpPr>
         <p:spPr>
           <a:xfrm>
-            <a:off x="1402435" y="9422609"/>
-            <a:ext cx="525913" cy="197217"/>
+            <a:off x="1424348" y="9397957"/>
+            <a:ext cx="473870" cy="219130"/>
           </a:xfrm>
           <a:prstGeom prst="rect">
             <a:avLst/>
@@ -22891,8 +22891,8 @@
         </p:nvSpPr>
         <p:spPr>
           <a:xfrm>
-            <a:off x="4201826" y="9422609"/>
-            <a:ext cx="525913" cy="197217"/>
+            <a:off x="4201826" y="9397957"/>
+            <a:ext cx="534130" cy="219130"/>
           </a:xfrm>
           <a:prstGeom prst="rect">
             <a:avLst/>
@@ -22989,8 +22989,8 @@
         </p:nvSpPr>
         <p:spPr>
           <a:xfrm>
-            <a:off x="723130" y="9762261"/>
-            <a:ext cx="6294522" cy="301304"/>
+            <a:off x="723130" y="9759522"/>
+            <a:ext cx="6283565" cy="298565"/>
           </a:xfrm>
           <a:prstGeom prst="rect">
             <a:avLst/>
@@ -23021,8 +23021,8 @@
         </p:nvSpPr>
         <p:spPr>
           <a:xfrm>
-            <a:off x="756000" y="9800609"/>
-            <a:ext cx="657391" cy="224609"/>
+            <a:off x="753261" y="9789652"/>
+            <a:ext cx="671087" cy="241043"/>
           </a:xfrm>
           <a:prstGeom prst="homePlate">
             <a:avLst>
@@ -23248,8 +23248,8 @@
         </p:nvSpPr>
         <p:spPr>
           <a:xfrm>
-            <a:off x="536870" y="766957"/>
-            <a:ext cx="975130" cy="345130"/>
+            <a:off x="552913" y="761478"/>
+            <a:ext cx="978261" cy="350609"/>
           </a:xfrm>
           <a:prstGeom prst="rect">
             <a:avLst/>
@@ -23311,8 +23311,8 @@
         </p:nvSpPr>
         <p:spPr>
           <a:xfrm>
-            <a:off x="1522957" y="777913"/>
-            <a:ext cx="5313913" cy="323217"/>
+            <a:off x="1531174" y="788870"/>
+            <a:ext cx="5295196" cy="301304"/>
           </a:xfrm>
           <a:prstGeom prst="rect">
             <a:avLst/>
@@ -23390,8 +23390,8 @@
         </p:nvSpPr>
         <p:spPr>
           <a:xfrm>
-            <a:off x="871043" y="1051826"/>
-            <a:ext cx="27391" cy="27391"/>
+            <a:off x="857348" y="1090174"/>
+            <a:ext cx="0" cy="0"/>
           </a:xfrm>
           <a:prstGeom prst="rect">
             <a:avLst/>
@@ -23420,8 +23420,8 @@
         </p:nvSpPr>
         <p:spPr>
           <a:xfrm>
-            <a:off x="947739" y="1051826"/>
-            <a:ext cx="27391" cy="27391"/>
+            <a:off x="991565" y="1090174"/>
+            <a:ext cx="0" cy="0"/>
           </a:xfrm>
           <a:prstGeom prst="rect">
             <a:avLst/>
@@ -23450,8 +23450,8 @@
         </p:nvSpPr>
         <p:spPr>
           <a:xfrm>
-            <a:off x="1024435" y="1051826"/>
-            <a:ext cx="27391" cy="27391"/>
+            <a:off x="991565" y="1090174"/>
+            <a:ext cx="95870" cy="0"/>
           </a:xfrm>
           <a:prstGeom prst="rect">
             <a:avLst/>
@@ -23480,8 +23480,8 @@
         </p:nvSpPr>
         <p:spPr>
           <a:xfrm>
-            <a:off x="1101130" y="1051826"/>
-            <a:ext cx="27391" cy="27391"/>
+            <a:off x="1087435" y="1090174"/>
+            <a:ext cx="63000" cy="0"/>
           </a:xfrm>
           <a:prstGeom prst="rect">
             <a:avLst/>
@@ -23510,8 +23510,8 @@
         </p:nvSpPr>
         <p:spPr>
           <a:xfrm>
-            <a:off x="1177826" y="1051826"/>
-            <a:ext cx="27391" cy="27391"/>
+            <a:off x="1185130" y="1090174"/>
+            <a:ext cx="0" cy="0"/>
           </a:xfrm>
           <a:prstGeom prst="rect">
             <a:avLst/>
@@ -23540,8 +23540,8 @@
         </p:nvSpPr>
         <p:spPr>
           <a:xfrm>
-            <a:off x="536870" y="1243565"/>
-            <a:ext cx="6300000" cy="301304"/>
+            <a:off x="552913" y="1235348"/>
+            <a:ext cx="6273457" cy="304043"/>
           </a:xfrm>
           <a:prstGeom prst="rect">
             <a:avLst/>
@@ -23831,8 +23831,8 @@
         </p:nvSpPr>
         <p:spPr>
           <a:xfrm>
-            <a:off x="4421894" y="1648957"/>
-            <a:ext cx="351016" cy="175304"/>
+            <a:off x="4399043" y="1681826"/>
+            <a:ext cx="336391" cy="134217"/>
           </a:xfrm>
           <a:prstGeom prst="rect">
             <a:avLst/>
@@ -23882,8 +23882,8 @@
         </p:nvSpPr>
         <p:spPr>
           <a:xfrm>
-            <a:off x="536870" y="1928348"/>
-            <a:ext cx="6310957" cy="750522"/>
+            <a:off x="552913" y="1920130"/>
+            <a:ext cx="6273457" cy="753261"/>
           </a:xfrm>
           <a:prstGeom prst="rect">
             <a:avLst/>
@@ -23914,8 +23914,8 @@
         </p:nvSpPr>
         <p:spPr>
           <a:xfrm>
-            <a:off x="536870" y="1939304"/>
-            <a:ext cx="602609" cy="728609"/>
+            <a:off x="552913" y="1920130"/>
+            <a:ext cx="597522" cy="753261"/>
           </a:xfrm>
           <a:prstGeom prst="rect">
             <a:avLst/>
@@ -23965,8 +23965,8 @@
         </p:nvSpPr>
         <p:spPr>
           <a:xfrm>
-            <a:off x="1188783" y="1955739"/>
-            <a:ext cx="2799391" cy="230087"/>
+            <a:off x="1185130" y="1920130"/>
+            <a:ext cx="2808522" cy="262957"/>
           </a:xfrm>
           <a:prstGeom prst="rect">
             <a:avLst/>
@@ -24016,8 +24016,8 @@
         </p:nvSpPr>
         <p:spPr>
           <a:xfrm>
-            <a:off x="4015565" y="1955739"/>
-            <a:ext cx="2782957" cy="230087"/>
+            <a:off x="3993652" y="1920130"/>
+            <a:ext cx="2777478" cy="262957"/>
           </a:xfrm>
           <a:prstGeom prst="rect">
             <a:avLst/>
@@ -24246,8 +24246,8 @@
         </p:nvSpPr>
         <p:spPr>
           <a:xfrm>
-            <a:off x="1698261" y="2695304"/>
-            <a:ext cx="4601739" cy="186261"/>
+            <a:off x="1720174" y="2673391"/>
+            <a:ext cx="4590783" cy="223696"/>
           </a:xfrm>
           <a:prstGeom prst="rect">
             <a:avLst/>
@@ -24276,8 +24276,8 @@
         </p:nvSpPr>
         <p:spPr>
           <a:xfrm>
-            <a:off x="1742087" y="2684348"/>
-            <a:ext cx="4514087" cy="153391"/>
+            <a:off x="1720174" y="2673391"/>
+            <a:ext cx="4519565" cy="123261"/>
           </a:xfrm>
           <a:prstGeom prst="rect">
             <a:avLst/>
@@ -24306,8 +24306,8 @@
         </p:nvSpPr>
         <p:spPr>
           <a:xfrm>
-            <a:off x="3637565" y="2826783"/>
-            <a:ext cx="723130" cy="38348"/>
+            <a:off x="3618391" y="2796652"/>
+            <a:ext cx="720391" cy="100435"/>
           </a:xfrm>
           <a:prstGeom prst="rect">
             <a:avLst/>
@@ -24336,8 +24336,8 @@
         </p:nvSpPr>
         <p:spPr>
           <a:xfrm rot="10800000">
-            <a:off x="3922435" y="2865130"/>
-            <a:ext cx="153391" cy="82174"/>
+            <a:off x="3919696" y="2897087"/>
+            <a:ext cx="142435" cy="31043"/>
           </a:xfrm>
           <a:prstGeom prst="triangle">
             <a:avLst/>
@@ -24366,8 +24366,8 @@
         </p:nvSpPr>
         <p:spPr>
           <a:xfrm>
-            <a:off x="536870" y="2903478"/>
-            <a:ext cx="6310957" cy="1720174"/>
+            <a:off x="552913" y="2897087"/>
+            <a:ext cx="6273457" cy="1722000"/>
           </a:xfrm>
           <a:prstGeom prst="rect">
             <a:avLst/>
@@ -24398,8 +24398,8 @@
         </p:nvSpPr>
         <p:spPr>
           <a:xfrm>
-            <a:off x="536870" y="2914435"/>
-            <a:ext cx="602609" cy="717652"/>
+            <a:off x="552913" y="2928130"/>
+            <a:ext cx="597522" cy="717652"/>
           </a:xfrm>
           <a:prstGeom prst="rect">
             <a:avLst/>
@@ -24473,8 +24473,8 @@
         </p:nvSpPr>
         <p:spPr>
           <a:xfrm>
-            <a:off x="536870" y="3654000"/>
-            <a:ext cx="602609" cy="958696"/>
+            <a:off x="552913" y="3645783"/>
+            <a:ext cx="597522" cy="973304"/>
           </a:xfrm>
           <a:prstGeom prst="rect">
             <a:avLst/>
@@ -24548,8 +24548,8 @@
         </p:nvSpPr>
         <p:spPr>
           <a:xfrm>
-            <a:off x="1188783" y="2930870"/>
-            <a:ext cx="2799391" cy="230087"/>
+            <a:off x="1185130" y="2928130"/>
+            <a:ext cx="2808522" cy="235565"/>
           </a:xfrm>
           <a:prstGeom prst="rect">
             <a:avLst/>
@@ -24599,8 +24599,8 @@
         </p:nvSpPr>
         <p:spPr>
           <a:xfrm>
-            <a:off x="4015565" y="2930870"/>
-            <a:ext cx="2782957" cy="230087"/>
+            <a:off x="3993652" y="2928130"/>
+            <a:ext cx="2777478" cy="235565"/>
           </a:xfrm>
           <a:prstGeom prst="rect">
             <a:avLst/>
@@ -24829,8 +24829,8 @@
         </p:nvSpPr>
         <p:spPr>
           <a:xfrm>
-            <a:off x="1188783" y="3670435"/>
-            <a:ext cx="1446261" cy="241043"/>
+            <a:off x="1185130" y="3670435"/>
+            <a:ext cx="1428000" cy="235565"/>
           </a:xfrm>
           <a:prstGeom prst="rect">
             <a:avLst/>
@@ -24880,8 +24880,8 @@
         </p:nvSpPr>
         <p:spPr>
           <a:xfrm>
-            <a:off x="2635043" y="3670435"/>
-            <a:ext cx="1446261" cy="241043"/>
+            <a:off x="2613130" y="3670435"/>
+            <a:ext cx="1449000" cy="235565"/>
           </a:xfrm>
           <a:prstGeom prst="rect">
             <a:avLst/>
@@ -24931,8 +24931,8 @@
         </p:nvSpPr>
         <p:spPr>
           <a:xfrm>
-            <a:off x="4081304" y="3670435"/>
-            <a:ext cx="1451739" cy="241043"/>
+            <a:off x="4062130" y="3670435"/>
+            <a:ext cx="1504878" cy="235565"/>
           </a:xfrm>
           <a:prstGeom prst="rect">
             <a:avLst/>
@@ -24982,8 +24982,8 @@
         </p:nvSpPr>
         <p:spPr>
           <a:xfrm>
-            <a:off x="5533043" y="3670435"/>
-            <a:ext cx="1281913" cy="241043"/>
+            <a:off x="5567009" y="3670435"/>
+            <a:ext cx="1259361" cy="235565"/>
           </a:xfrm>
           <a:prstGeom prst="rect">
             <a:avLst/>
@@ -25033,8 +25033,8 @@
         </p:nvSpPr>
         <p:spPr>
           <a:xfrm>
-            <a:off x="2492609" y="3681391"/>
-            <a:ext cx="219130" cy="219130"/>
+            <a:off x="2524930" y="3670435"/>
+            <a:ext cx="197765" cy="235565"/>
           </a:xfrm>
           <a:prstGeom prst="rect">
             <a:avLst/>
@@ -25086,8 +25086,8 @@
         </p:nvSpPr>
         <p:spPr>
           <a:xfrm>
-            <a:off x="3938870" y="3681391"/>
-            <a:ext cx="219130" cy="219130"/>
+            <a:off x="3919696" y="3670435"/>
+            <a:ext cx="252000" cy="235565"/>
           </a:xfrm>
           <a:prstGeom prst="rect">
             <a:avLst/>
@@ -25139,8 +25139,8 @@
         </p:nvSpPr>
         <p:spPr>
           <a:xfrm>
-            <a:off x="5390609" y="3681391"/>
-            <a:ext cx="219130" cy="219130"/>
+            <a:off x="5389696" y="3670435"/>
+            <a:ext cx="243600" cy="235565"/>
           </a:xfrm>
           <a:prstGeom prst="rect">
             <a:avLst/>
@@ -25543,8 +25543,8 @@
         </p:nvSpPr>
         <p:spPr>
           <a:xfrm>
-            <a:off x="536870" y="4700348"/>
-            <a:ext cx="6310957" cy="1144957"/>
+            <a:off x="552913" y="4697609"/>
+            <a:ext cx="6273457" cy="1144957"/>
           </a:xfrm>
           <a:prstGeom prst="rect">
             <a:avLst/>
@@ -25575,8 +25575,8 @@
         </p:nvSpPr>
         <p:spPr>
           <a:xfrm>
-            <a:off x="536870" y="4711304"/>
-            <a:ext cx="602609" cy="1123043"/>
+            <a:off x="552913" y="4697609"/>
+            <a:ext cx="597522" cy="1144957"/>
           </a:xfrm>
           <a:prstGeom prst="rect">
             <a:avLst/>
@@ -25650,8 +25650,8 @@
         </p:nvSpPr>
         <p:spPr>
           <a:xfrm>
-            <a:off x="1188783" y="4722261"/>
-            <a:ext cx="2799391" cy="219130"/>
+            <a:off x="1185130" y="4730478"/>
+            <a:ext cx="2808522" cy="232826"/>
           </a:xfrm>
           <a:prstGeom prst="rect">
             <a:avLst/>
@@ -25701,8 +25701,8 @@
         </p:nvSpPr>
         <p:spPr>
           <a:xfrm>
-            <a:off x="4015565" y="4722261"/>
-            <a:ext cx="2782957" cy="219130"/>
+            <a:off x="3993652" y="4730478"/>
+            <a:ext cx="2777478" cy="232826"/>
           </a:xfrm>
           <a:prstGeom prst="rect">
             <a:avLst/>
@@ -26895,8 +26895,8 @@
         </p:nvSpPr>
         <p:spPr>
           <a:xfrm>
-            <a:off x="536870" y="6272609"/>
-            <a:ext cx="6310957" cy="2246087"/>
+            <a:off x="552913" y="6264391"/>
+            <a:ext cx="6273457" cy="2259783"/>
           </a:xfrm>
           <a:prstGeom prst="rect">
             <a:avLst/>
@@ -26927,8 +26927,8 @@
         </p:nvSpPr>
         <p:spPr>
           <a:xfrm>
-            <a:off x="536870" y="6283565"/>
-            <a:ext cx="602609" cy="717652"/>
+            <a:off x="552913" y="6264391"/>
+            <a:ext cx="597522" cy="750522"/>
           </a:xfrm>
           <a:prstGeom prst="rect">
             <a:avLst/>
@@ -27002,8 +27002,8 @@
         </p:nvSpPr>
         <p:spPr>
           <a:xfrm>
-            <a:off x="536870" y="7034087"/>
-            <a:ext cx="602609" cy="706696"/>
+            <a:off x="552913" y="7014913"/>
+            <a:ext cx="597522" cy="742304"/>
           </a:xfrm>
           <a:prstGeom prst="rect">
             <a:avLst/>
@@ -27077,8 +27077,8 @@
         </p:nvSpPr>
         <p:spPr>
           <a:xfrm>
-            <a:off x="536870" y="7768174"/>
-            <a:ext cx="602609" cy="739565"/>
+            <a:off x="552913" y="7757217"/>
+            <a:ext cx="597522" cy="734087"/>
           </a:xfrm>
           <a:prstGeom prst="rect">
             <a:avLst/>
@@ -27152,8 +27152,8 @@
         </p:nvSpPr>
         <p:spPr>
           <a:xfrm>
-            <a:off x="1188783" y="6300000"/>
-            <a:ext cx="2799391" cy="230087"/>
+            <a:off x="1185130" y="6264391"/>
+            <a:ext cx="2808522" cy="268435"/>
           </a:xfrm>
           <a:prstGeom prst="rect">
             <a:avLst/>
@@ -27203,8 +27203,8 @@
         </p:nvSpPr>
         <p:spPr>
           <a:xfrm>
-            <a:off x="4015565" y="6300000"/>
-            <a:ext cx="2782957" cy="230087"/>
+            <a:off x="3993652" y="6264391"/>
+            <a:ext cx="2777478" cy="268435"/>
           </a:xfrm>
           <a:prstGeom prst="rect">
             <a:avLst/>
@@ -27433,8 +27433,8 @@
         </p:nvSpPr>
         <p:spPr>
           <a:xfrm>
-            <a:off x="1188783" y="7045043"/>
-            <a:ext cx="2799391" cy="230087"/>
+            <a:off x="1185130" y="7014913"/>
+            <a:ext cx="2808522" cy="260217"/>
           </a:xfrm>
           <a:prstGeom prst="rect">
             <a:avLst/>
@@ -27484,8 +27484,8 @@
         </p:nvSpPr>
         <p:spPr>
           <a:xfrm>
-            <a:off x="4015565" y="7045043"/>
-            <a:ext cx="2782957" cy="230087"/>
+            <a:off x="3993652" y="7014913"/>
+            <a:ext cx="2777478" cy="260217"/>
           </a:xfrm>
           <a:prstGeom prst="rect">
             <a:avLst/>
@@ -27714,8 +27714,8 @@
         </p:nvSpPr>
         <p:spPr>
           <a:xfrm>
-            <a:off x="1188783" y="7779130"/>
-            <a:ext cx="1446261" cy="241043"/>
+            <a:off x="1185130" y="7779130"/>
+            <a:ext cx="1428000" cy="238304"/>
           </a:xfrm>
           <a:prstGeom prst="rect">
             <a:avLst/>
@@ -27765,8 +27765,8 @@
         </p:nvSpPr>
         <p:spPr>
           <a:xfrm>
-            <a:off x="2635043" y="7779130"/>
-            <a:ext cx="1446261" cy="241043"/>
+            <a:off x="2613130" y="7779130"/>
+            <a:ext cx="1449000" cy="238304"/>
           </a:xfrm>
           <a:prstGeom prst="rect">
             <a:avLst/>
@@ -27816,8 +27816,8 @@
         </p:nvSpPr>
         <p:spPr>
           <a:xfrm>
-            <a:off x="4081304" y="7779130"/>
-            <a:ext cx="1451739" cy="241043"/>
+            <a:off x="4062130" y="7779130"/>
+            <a:ext cx="1504878" cy="238304"/>
           </a:xfrm>
           <a:prstGeom prst="rect">
             <a:avLst/>
@@ -27867,8 +27867,8 @@
         </p:nvSpPr>
         <p:spPr>
           <a:xfrm>
-            <a:off x="5533043" y="7779130"/>
-            <a:ext cx="1281913" cy="241043"/>
+            <a:off x="5567009" y="7779130"/>
+            <a:ext cx="1259361" cy="238304"/>
           </a:xfrm>
           <a:prstGeom prst="rect">
             <a:avLst/>
@@ -27918,8 +27918,8 @@
         </p:nvSpPr>
         <p:spPr>
           <a:xfrm>
-            <a:off x="2492609" y="7790087"/>
-            <a:ext cx="219130" cy="219130"/>
+            <a:off x="2524930" y="7779130"/>
+            <a:ext cx="197765" cy="238304"/>
           </a:xfrm>
           <a:prstGeom prst="rect">
             <a:avLst/>
@@ -27971,8 +27971,8 @@
         </p:nvSpPr>
         <p:spPr>
           <a:xfrm>
-            <a:off x="3938870" y="7790087"/>
-            <a:ext cx="219130" cy="219130"/>
+            <a:off x="3919696" y="7779130"/>
+            <a:ext cx="252000" cy="238304"/>
           </a:xfrm>
           <a:prstGeom prst="rect">
             <a:avLst/>
@@ -28024,8 +28024,8 @@
         </p:nvSpPr>
         <p:spPr>
           <a:xfrm>
-            <a:off x="5390609" y="7790087"/>
-            <a:ext cx="219130" cy="219130"/>
+            <a:off x="5389696" y="7779130"/>
+            <a:ext cx="243600" cy="238304"/>
           </a:xfrm>
           <a:prstGeom prst="rect">
             <a:avLst/>
@@ -28344,8 +28344,8 @@
         </p:nvSpPr>
         <p:spPr>
           <a:xfrm>
-            <a:off x="536870" y="8611826"/>
-            <a:ext cx="6310957" cy="1084696"/>
+            <a:off x="552913" y="8607261"/>
+            <a:ext cx="6273457" cy="1092000"/>
           </a:xfrm>
           <a:prstGeom prst="rect">
             <a:avLst/>
@@ -28376,8 +28376,8 @@
         </p:nvSpPr>
         <p:spPr>
           <a:xfrm>
-            <a:off x="536870" y="8622783"/>
-            <a:ext cx="602609" cy="1062783"/>
+            <a:off x="552913" y="8636478"/>
+            <a:ext cx="597522" cy="1062783"/>
           </a:xfrm>
           <a:prstGeom prst="rect">
             <a:avLst/>
@@ -28451,8 +28451,8 @@
         </p:nvSpPr>
         <p:spPr>
           <a:xfrm>
-            <a:off x="1188783" y="8639217"/>
-            <a:ext cx="4174435" cy="235565"/>
+            <a:off x="1185130" y="8636478"/>
+            <a:ext cx="4204565" cy="235565"/>
           </a:xfrm>
           <a:prstGeom prst="rect">
             <a:avLst/>
@@ -28553,8 +28553,8 @@
         </p:nvSpPr>
         <p:spPr>
           <a:xfrm>
-            <a:off x="1287391" y="9148696"/>
-            <a:ext cx="525913" cy="175304"/>
+            <a:off x="1287391" y="9137739"/>
+            <a:ext cx="538656" cy="205435"/>
           </a:xfrm>
           <a:prstGeom prst="rect">
             <a:avLst/>
@@ -28651,8 +28651,8 @@
         </p:nvSpPr>
         <p:spPr>
           <a:xfrm>
-            <a:off x="1287391" y="9378783"/>
-            <a:ext cx="525913" cy="186261"/>
+            <a:off x="1287391" y="9397957"/>
+            <a:ext cx="538656" cy="167087"/>
           </a:xfrm>
           <a:prstGeom prst="rect">
             <a:avLst/>
@@ -28749,8 +28749,8 @@
         </p:nvSpPr>
         <p:spPr>
           <a:xfrm>
-            <a:off x="5396087" y="8600870"/>
-            <a:ext cx="1380522" cy="1040870"/>
+            <a:off x="5389696" y="8607261"/>
+            <a:ext cx="1381435" cy="1031739"/>
           </a:xfrm>
           <a:prstGeom prst="rect">
             <a:avLst/>
@@ -28802,8 +28802,8 @@
         </p:nvSpPr>
         <p:spPr>
           <a:xfrm>
-            <a:off x="536870" y="9789652"/>
-            <a:ext cx="6300000" cy="301304"/>
+            <a:off x="552913" y="9803348"/>
+            <a:ext cx="6273457" cy="271174"/>
           </a:xfrm>
           <a:prstGeom prst="rect">
             <a:avLst/>
@@ -28834,8 +28834,8 @@
         </p:nvSpPr>
         <p:spPr>
           <a:xfrm>
-            <a:off x="569739" y="9828000"/>
-            <a:ext cx="657391" cy="224609"/>
+            <a:off x="552913" y="9803348"/>
+            <a:ext cx="632217" cy="241043"/>
           </a:xfrm>
           <a:prstGeom prst="homePlate">
             <a:avLst>
